--- a/Adaptive_CPU_Scheduling_Optimizer_Presentation.pptx
+++ b/Adaptive_CPU_Scheduling_Optimizer_Presentation.pptx
@@ -15,6 +15,8 @@
     <p:sldId id="263" r:id="rId14"/>
     <p:sldId id="264" r:id="rId15"/>
     <p:sldId id="265" r:id="rId16"/>
+    <p:sldId id="266" r:id="rId17"/>
+    <p:sldId id="267" r:id="rId18"/>
   </p:sldIdLst>
   <p:sldSz cx="12191695" cy="6858000" type="screen4x3"/>
   <p:notesSz cx="6858000" cy="9144000"/>
@@ -3148,8 +3150,8 @@
         </p:nvSpPr>
         <p:spPr>
           <a:xfrm>
-            <a:off x="731520" y="1097280"/>
-            <a:ext cx="2926080" cy="320040"/>
+            <a:off x="731520" y="1005840"/>
+            <a:ext cx="3108960" cy="320040"/>
           </a:xfrm>
           <a:prstGeom prst="roundRect">
             <a:avLst/>
@@ -3200,7 +3202,7 @@
         </p:nvSpPr>
         <p:spPr>
           <a:xfrm>
-            <a:off x="731520" y="1554480"/>
+            <a:off x="731520" y="1463040"/>
             <a:ext cx="10698480" cy="1645920"/>
           </a:xfrm>
           <a:prstGeom prst="rect">
@@ -3247,7 +3249,7 @@
         </p:nvSpPr>
         <p:spPr>
           <a:xfrm>
-            <a:off x="731520" y="3291840"/>
+            <a:off x="731520" y="3200400"/>
             <a:ext cx="10515600" cy="1097280"/>
           </a:xfrm>
           <a:prstGeom prst="rect">
@@ -3262,7 +3264,7 @@
           <a:lstStyle/>
           <a:p>
             <a:pPr>
-              <a:defRPr sz="1400">
+              <a:defRPr sz="1300">
                 <a:solidFill>
                   <a:srgbClr val="94A3B8"/>
                 </a:solidFill>
@@ -3282,8 +3284,8 @@
         </p:nvSpPr>
         <p:spPr>
           <a:xfrm>
-            <a:off x="731520" y="4663440"/>
-            <a:ext cx="3474720" cy="1371600"/>
+            <a:off x="731520" y="4572000"/>
+            <a:ext cx="3474720" cy="1463040"/>
           </a:xfrm>
           <a:prstGeom prst="roundRect">
             <a:avLst/>
@@ -3327,8 +3329,8 @@
         </p:nvSpPr>
         <p:spPr>
           <a:xfrm>
-            <a:off x="914400" y="4754880"/>
-            <a:ext cx="3108960" cy="1188720"/>
+            <a:off x="914400" y="4663440"/>
+            <a:ext cx="3108960" cy="1280160"/>
           </a:xfrm>
           <a:prstGeom prst="rect">
             <a:avLst/>
@@ -3377,8 +3379,8 @@
         </p:nvSpPr>
         <p:spPr>
           <a:xfrm>
-            <a:off x="4343400" y="4663440"/>
-            <a:ext cx="3474720" cy="1371600"/>
+            <a:off x="4343400" y="4572000"/>
+            <a:ext cx="3474720" cy="1463040"/>
           </a:xfrm>
           <a:prstGeom prst="roundRect">
             <a:avLst/>
@@ -3422,8 +3424,8 @@
         </p:nvSpPr>
         <p:spPr>
           <a:xfrm>
-            <a:off x="4526280" y="4754880"/>
-            <a:ext cx="3108960" cy="1188720"/>
+            <a:off x="4526280" y="4663440"/>
+            <a:ext cx="3108960" cy="1280160"/>
           </a:xfrm>
           <a:prstGeom prst="rect">
             <a:avLst/>
@@ -3472,8 +3474,8 @@
         </p:nvSpPr>
         <p:spPr>
           <a:xfrm>
-            <a:off x="7955280" y="4663440"/>
-            <a:ext cx="3474720" cy="1371600"/>
+            <a:off x="7955280" y="4572000"/>
+            <a:ext cx="3474720" cy="1463040"/>
           </a:xfrm>
           <a:prstGeom prst="roundRect">
             <a:avLst/>
@@ -3517,8 +3519,8 @@
         </p:nvSpPr>
         <p:spPr>
           <a:xfrm>
-            <a:off x="8138160" y="4754880"/>
-            <a:ext cx="3108960" cy="1188720"/>
+            <a:off x="8138160" y="4663440"/>
+            <a:ext cx="3108960" cy="1280160"/>
           </a:xfrm>
           <a:prstGeom prst="rect">
             <a:avLst/>
@@ -3650,7 +3652,7 @@
               </a:defRPr>
             </a:pPr>
             <a:r>
-              <a:t>SUMMARY &amp; CONCLUSION</a:t>
+              <a:t>THEORETICAL INSIGHT</a:t>
             </a:r>
           </a:p>
         </p:txBody>
@@ -3664,7 +3666,7 @@
         <p:spPr>
           <a:xfrm>
             <a:off x="731520" y="640080"/>
-            <a:ext cx="10698480" cy="548640"/>
+            <a:ext cx="10698480" cy="502920"/>
           </a:xfrm>
           <a:prstGeom prst="rect">
             <a:avLst/>
@@ -3678,14 +3680,14 @@
           <a:lstStyle/>
           <a:p>
             <a:pPr>
-              <a:defRPr sz="2200" b="1">
-                <a:solidFill>
-                  <a:srgbClr val="F8FAFC"/>
-                </a:solidFill>
-              </a:defRPr>
-            </a:pPr>
-            <a:r>
-              <a:t>Key Takeaways &amp; Academic Deliverables</a:t>
+              <a:defRPr sz="2100" b="1">
+                <a:solidFill>
+                  <a:srgbClr val="F8FAFC"/>
+                </a:solidFill>
+              </a:defRPr>
+            </a:pPr>
+            <a:r>
+              <a:t>The Fundamental Operating System Trade-Off</a:t>
             </a:r>
           </a:p>
         </p:txBody>
@@ -3698,7 +3700,7 @@
         </p:nvSpPr>
         <p:spPr>
           <a:xfrm>
-            <a:off x="731520" y="1143000"/>
+            <a:off x="731520" y="1097280"/>
             <a:ext cx="10698480" cy="365760"/>
           </a:xfrm>
           <a:prstGeom prst="rect">
@@ -3713,14 +3715,14 @@
           <a:lstStyle/>
           <a:p>
             <a:pPr>
-              <a:defRPr sz="1200">
+              <a:defRPr sz="1100">
                 <a:solidFill>
                   <a:srgbClr val="94A3B8"/>
                 </a:solidFill>
               </a:defRPr>
             </a:pPr>
             <a:r>
-              <a:t>Demonstrated results, engineering accomplishments, and standalone portability.</a:t>
+              <a:t>Why no single scheduling algorithm is universally superior under all operating conditions.</a:t>
             </a:r>
           </a:p>
         </p:txBody>
@@ -3734,7 +3736,7 @@
         <p:spPr>
           <a:xfrm>
             <a:off x="731520" y="1645920"/>
-            <a:ext cx="5212080" cy="4572000"/>
+            <a:ext cx="5212080" cy="4663440"/>
           </a:xfrm>
           <a:prstGeom prst="roundRect">
             <a:avLst/>
@@ -3778,8 +3780,8 @@
         </p:nvSpPr>
         <p:spPr>
           <a:xfrm>
-            <a:off x="960120" y="1828800"/>
-            <a:ext cx="4754880" cy="4206240"/>
+            <a:off x="914400" y="1783080"/>
+            <a:ext cx="4846320" cy="4389120"/>
           </a:xfrm>
           <a:prstGeom prst="rect">
             <a:avLst/>
@@ -3794,22 +3796,22 @@
           <a:p>
             <a:pPr>
               <a:spcAft>
-                <a:spcPts val="1000"/>
-              </a:spcAft>
-              <a:defRPr sz="1400" b="1">
-                <a:solidFill>
-                  <a:srgbClr val="38BDF8"/>
-                </a:solidFill>
-              </a:defRPr>
-            </a:pPr>
-            <a:r>
-              <a:t>Project Accomplishments</a:t>
-            </a:r>
-          </a:p>
-          <a:p>
-            <a:pPr>
-              <a:spcAft>
-                <a:spcPts val="600"/>
+                <a:spcPts val="800"/>
+              </a:spcAft>
+              <a:defRPr sz="1300" b="1">
+                <a:solidFill>
+                  <a:srgbClr val="F59E0B"/>
+                </a:solidFill>
+              </a:defRPr>
+            </a:pPr>
+            <a:r>
+              <a:t>When FCFS is Optimal (Low Contention)</a:t>
+            </a:r>
+          </a:p>
+          <a:p>
+            <a:pPr>
+              <a:spcAft>
+                <a:spcPts val="400"/>
               </a:spcAft>
               <a:defRPr sz="1100">
                 <a:solidFill>
@@ -3818,13 +3820,13 @@
               </a:defRPr>
             </a:pPr>
             <a:r>
-              <a:t>• 1. Full-Stack Native Implementation: C99 backend + embedded HTTP server + live browser frontend with zero external dependencies.</a:t>
-            </a:r>
-          </a:p>
-          <a:p>
-            <a:pPr>
-              <a:spcAft>
-                <a:spcPts val="600"/>
+              <a:t>• Zero Algorithm Overhead: FCFS incurs O(1) scheduling logic with zero kernel-mode context switches.</a:t>
+            </a:r>
+          </a:p>
+          <a:p>
+            <a:pPr>
+              <a:spcAft>
+                <a:spcPts val="400"/>
               </a:spcAft>
               <a:defRPr sz="1100">
                 <a:solidFill>
@@ -3833,13 +3835,13 @@
               </a:defRPr>
             </a:pPr>
             <a:r>
-              <a:t>• 2. Real Application Validation: Moving beyond synthetic toys by measuring actual multi-process Google Chrome browser execution.</a:t>
-            </a:r>
-          </a:p>
-          <a:p>
-            <a:pPr>
-              <a:spcAft>
-                <a:spcPts val="600"/>
+              <a:t>• Superior Cache Locality: Threads remain warm on their allocated physical cores without thread migration.</a:t>
+            </a:r>
+          </a:p>
+          <a:p>
+            <a:pPr>
+              <a:spcAft>
+                <a:spcPts val="400"/>
               </a:spcAft>
               <a:defRPr sz="1100">
                 <a:solidFill>
@@ -3848,13 +3850,13 @@
               </a:defRPr>
             </a:pPr>
             <a:r>
-              <a:t>• 3. Live Preemption Demonstration: Visibly showing the Convoy Effect under FCFS and its resolution via Adaptive Priority modulation.</a:t>
-            </a:r>
-          </a:p>
-          <a:p>
-            <a:pPr>
-              <a:spcAft>
-                <a:spcPts val="600"/>
+              <a:t>• Zero System Call Penalties: No periodic SetThreadPriority or watchdog timer interrupts.</a:t>
+            </a:r>
+          </a:p>
+          <a:p>
+            <a:pPr>
+              <a:spcAft>
+                <a:spcPts val="400"/>
               </a:spcAft>
               <a:defRPr sz="1100">
                 <a:solidFill>
@@ -3863,7 +3865,7 @@
               </a:defRPr>
             </a:pPr>
             <a:r>
-              <a:t>• 4. Academic Rigor: Truthful reporting, sub-microsecond QPC timing, and empirical validation of theoretical OS principles.</a:t>
+              <a:t>• When CPU cores have idle capacity (core slack), FCFS matches or slightly beats Adaptive because priority management overhead is avoided.</a:t>
             </a:r>
           </a:p>
         </p:txBody>
@@ -3877,7 +3879,7 @@
         <p:spPr>
           <a:xfrm>
             <a:off x="6217920" y="1645920"/>
-            <a:ext cx="5212080" cy="4572000"/>
+            <a:ext cx="5212080" cy="4663440"/>
           </a:xfrm>
           <a:prstGeom prst="roundRect">
             <a:avLst/>
@@ -3921,8 +3923,8 @@
         </p:nvSpPr>
         <p:spPr>
           <a:xfrm>
-            <a:off x="6446520" y="1828800"/>
-            <a:ext cx="4754880" cy="4206240"/>
+            <a:off x="6400800" y="1783080"/>
+            <a:ext cx="4846320" cy="4389120"/>
           </a:xfrm>
           <a:prstGeom prst="rect">
             <a:avLst/>
@@ -3937,22 +3939,22 @@
           <a:p>
             <a:pPr>
               <a:spcAft>
-                <a:spcPts val="1000"/>
-              </a:spcAft>
-              <a:defRPr sz="1400" b="1">
+                <a:spcPts val="800"/>
+              </a:spcAft>
+              <a:defRPr sz="1300" b="1">
                 <a:solidFill>
                   <a:srgbClr val="10B981"/>
                 </a:solidFill>
               </a:defRPr>
             </a:pPr>
             <a:r>
-              <a:t>Artifacts &amp; Open Source Deliverables</a:t>
-            </a:r>
-          </a:p>
-          <a:p>
-            <a:pPr>
-              <a:spcAft>
-                <a:spcPts val="600"/>
+              <a:t>When Adaptive is Vital (High Saturation)</a:t>
+            </a:r>
+          </a:p>
+          <a:p>
+            <a:pPr>
+              <a:spcAft>
+                <a:spcPts val="400"/>
               </a:spcAft>
               <a:defRPr sz="1100">
                 <a:solidFill>
@@ -3961,13 +3963,13 @@
               </a:defRPr>
             </a:pPr>
             <a:r>
-              <a:t>• • Standalone Release ZIP: Portable package containing adaptive_scheduler.exe and web assets; runs on any modern 64-bit Windows laptop with double-click execution.</a:t>
-            </a:r>
-          </a:p>
-          <a:p>
-            <a:pPr>
-              <a:spcAft>
-                <a:spcPts val="600"/>
+              <a:t>• Preemptive Guarantee: Prevents heavy compute jobs from holding the CPU hostage.</a:t>
+            </a:r>
+          </a:p>
+          <a:p>
+            <a:pPr>
+              <a:spcAft>
+                <a:spcPts val="400"/>
               </a:spcAft>
               <a:defRPr sz="1100">
                 <a:solidFill>
@@ -3976,13 +3978,992 @@
               </a:defRPr>
             </a:pPr>
             <a:r>
+              <a:t>• Interactive Latency Slashed: Reduces browser load times by &gt;50% and eliminates UI freezing.</a:t>
+            </a:r>
+          </a:p>
+          <a:p>
+            <a:pPr>
+              <a:spcAft>
+                <a:spcPts val="400"/>
+              </a:spcAft>
+              <a:defRPr sz="1100">
+                <a:solidFill>
+                  <a:srgbClr val="F8FAFC"/>
+                </a:solidFill>
+              </a:defRPr>
+            </a:pPr>
+            <a:r>
+              <a:t>• Acceptable Trade-off: Background computation experiences a minor makespan penalty in exchange for human UI responsiveness.</a:t>
+            </a:r>
+          </a:p>
+          <a:p>
+            <a:pPr>
+              <a:spcAft>
+                <a:spcPts val="400"/>
+              </a:spcAft>
+              <a:defRPr sz="1100">
+                <a:solidFill>
+                  <a:srgbClr val="F8FAFC"/>
+                </a:solidFill>
+              </a:defRPr>
+            </a:pPr>
+            <a:r>
+              <a:t>• Starvation Immunity: Dynamic aging ensures long batch tasks always achieve forward progress.</a:t>
+            </a:r>
+          </a:p>
+          <a:p>
+            <a:pPr>
+              <a:spcAft>
+                <a:spcPts val="400"/>
+              </a:spcAft>
+              <a:defRPr sz="1100">
+                <a:solidFill>
+                  <a:srgbClr val="F8FAFC"/>
+                </a:solidFill>
+              </a:defRPr>
+            </a:pPr>
+            <a:r>
+              <a:t>• Reflects the architectural philosophy of modern production schedulers (Linux CFS, Windows NT Priority Bands).</a:t>
+            </a:r>
+          </a:p>
+        </p:txBody>
+      </p:sp>
+    </p:spTree>
+  </p:cSld>
+  <p:clrMapOvr>
+    <a:masterClrMapping/>
+  </p:clrMapOvr>
+</p:sld>
+</file>
+
+<file path=ppt/slides/slide11.xml><?xml version="1.0" encoding="utf-8"?>
+<p:sld xmlns:a="http://schemas.openxmlformats.org/drawingml/2006/main" xmlns:p="http://schemas.openxmlformats.org/presentationml/2006/main" xmlns:r="http://schemas.openxmlformats.org/officeDocument/2006/relationships">
+  <p:cSld>
+    <p:spTree>
+      <p:nvGrpSpPr>
+        <p:cNvPr id="1" name=""/>
+        <p:cNvGrpSpPr/>
+        <p:nvPr/>
+      </p:nvGrpSpPr>
+      <p:grpSpPr/>
+      <p:sp>
+        <p:nvSpPr>
+          <p:cNvPr id="2" name="Rectangle 1"/>
+          <p:cNvSpPr/>
+          <p:nvPr/>
+        </p:nvSpPr>
+        <p:spPr>
+          <a:xfrm>
+            <a:off x="0" y="0"/>
+            <a:ext cx="12191695" cy="6858000"/>
+          </a:xfrm>
+          <a:prstGeom prst="rect">
+            <a:avLst/>
+          </a:prstGeom>
+          <a:solidFill>
+            <a:srgbClr val="0B1120"/>
+          </a:solidFill>
+          <a:ln>
+            <a:noFill/>
+          </a:ln>
+        </p:spPr>
+        <p:style>
+          <a:lnRef idx="1">
+            <a:schemeClr val="accent1"/>
+          </a:lnRef>
+          <a:fillRef idx="3">
+            <a:schemeClr val="accent1"/>
+          </a:fillRef>
+          <a:effectRef idx="2">
+            <a:schemeClr val="accent1"/>
+          </a:effectRef>
+          <a:fontRef idx="minor">
+            <a:schemeClr val="lt1"/>
+          </a:fontRef>
+        </p:style>
+        <p:txBody>
+          <a:bodyPr rtlCol="0" anchor="ctr"/>
+          <a:lstStyle/>
+          <a:p>
+            <a:pPr algn="ctr"/>
+          </a:p>
+        </p:txBody>
+      </p:sp>
+      <p:sp>
+        <p:nvSpPr>
+          <p:cNvPr id="3" name="TextBox 2"/>
+          <p:cNvSpPr txBox="1"/>
+          <p:nvPr/>
+        </p:nvSpPr>
+        <p:spPr>
+          <a:xfrm>
+            <a:off x="731520" y="365760"/>
+            <a:ext cx="7315200" cy="320040"/>
+          </a:xfrm>
+          <a:prstGeom prst="rect">
+            <a:avLst/>
+          </a:prstGeom>
+          <a:noFill/>
+        </p:spPr>
+        <p:txBody>
+          <a:bodyPr wrap="square">
+            <a:spAutoFit/>
+          </a:bodyPr>
+          <a:lstStyle/>
+          <a:p>
+            <a:pPr>
+              <a:defRPr sz="1000" b="1">
+                <a:solidFill>
+                  <a:srgbClr val="38BDF8"/>
+                </a:solidFill>
+              </a:defRPr>
+            </a:pPr>
+            <a:r>
+              <a:t>ENGINEERING RIGOR</a:t>
+            </a:r>
+          </a:p>
+        </p:txBody>
+      </p:sp>
+      <p:sp>
+        <p:nvSpPr>
+          <p:cNvPr id="4" name="TextBox 3"/>
+          <p:cNvSpPr txBox="1"/>
+          <p:nvPr/>
+        </p:nvSpPr>
+        <p:spPr>
+          <a:xfrm>
+            <a:off x="731520" y="640080"/>
+            <a:ext cx="10698480" cy="502920"/>
+          </a:xfrm>
+          <a:prstGeom prst="rect">
+            <a:avLst/>
+          </a:prstGeom>
+          <a:noFill/>
+        </p:spPr>
+        <p:txBody>
+          <a:bodyPr wrap="square">
+            <a:spAutoFit/>
+          </a:bodyPr>
+          <a:lstStyle/>
+          <a:p>
+            <a:pPr>
+              <a:defRPr sz="2100" b="1">
+                <a:solidFill>
+                  <a:srgbClr val="F8FAFC"/>
+                </a:solidFill>
+              </a:defRPr>
+            </a:pPr>
+            <a:r>
+              <a:t>Verification, Testing &amp; Zero-Dependency Portability</a:t>
+            </a:r>
+          </a:p>
+        </p:txBody>
+      </p:sp>
+      <p:sp>
+        <p:nvSpPr>
+          <p:cNvPr id="5" name="TextBox 4"/>
+          <p:cNvSpPr txBox="1"/>
+          <p:nvPr/>
+        </p:nvSpPr>
+        <p:spPr>
+          <a:xfrm>
+            <a:off x="731520" y="1097280"/>
+            <a:ext cx="10698480" cy="365760"/>
+          </a:xfrm>
+          <a:prstGeom prst="rect">
+            <a:avLst/>
+          </a:prstGeom>
+          <a:noFill/>
+        </p:spPr>
+        <p:txBody>
+          <a:bodyPr wrap="square">
+            <a:spAutoFit/>
+          </a:bodyPr>
+          <a:lstStyle/>
+          <a:p>
+            <a:pPr>
+              <a:defRPr sz="1100">
+                <a:solidFill>
+                  <a:srgbClr val="94A3B8"/>
+                </a:solidFill>
+              </a:defRPr>
+            </a:pPr>
+            <a:r>
+              <a:t>How the system was compiled, verified, and packaged for standalone classroom demonstrations.</a:t>
+            </a:r>
+          </a:p>
+        </p:txBody>
+      </p:sp>
+      <p:sp>
+        <p:nvSpPr>
+          <p:cNvPr id="6" name="Rounded Rectangle 5"/>
+          <p:cNvSpPr/>
+          <p:nvPr/>
+        </p:nvSpPr>
+        <p:spPr>
+          <a:xfrm>
+            <a:off x="731520" y="1645920"/>
+            <a:ext cx="5212080" cy="4663440"/>
+          </a:xfrm>
+          <a:prstGeom prst="roundRect">
+            <a:avLst/>
+          </a:prstGeom>
+          <a:solidFill>
+            <a:srgbClr val="182136"/>
+          </a:solidFill>
+          <a:ln w="12700">
+            <a:solidFill>
+              <a:srgbClr val="334155"/>
+            </a:solidFill>
+          </a:ln>
+        </p:spPr>
+        <p:style>
+          <a:lnRef idx="1">
+            <a:schemeClr val="accent1"/>
+          </a:lnRef>
+          <a:fillRef idx="3">
+            <a:schemeClr val="accent1"/>
+          </a:fillRef>
+          <a:effectRef idx="2">
+            <a:schemeClr val="accent1"/>
+          </a:effectRef>
+          <a:fontRef idx="minor">
+            <a:schemeClr val="lt1"/>
+          </a:fontRef>
+        </p:style>
+        <p:txBody>
+          <a:bodyPr rtlCol="0" anchor="ctr"/>
+          <a:lstStyle/>
+          <a:p>
+            <a:pPr algn="ctr"/>
+          </a:p>
+        </p:txBody>
+      </p:sp>
+      <p:sp>
+        <p:nvSpPr>
+          <p:cNvPr id="7" name="TextBox 6"/>
+          <p:cNvSpPr txBox="1"/>
+          <p:nvPr/>
+        </p:nvSpPr>
+        <p:spPr>
+          <a:xfrm>
+            <a:off x="914400" y="1783080"/>
+            <a:ext cx="4846320" cy="4389120"/>
+          </a:xfrm>
+          <a:prstGeom prst="rect">
+            <a:avLst/>
+          </a:prstGeom>
+          <a:noFill/>
+        </p:spPr>
+        <p:txBody>
+          <a:bodyPr wrap="square">
+            <a:spAutoFit/>
+          </a:bodyPr>
+          <a:lstStyle/>
+          <a:p>
+            <a:pPr>
+              <a:spcAft>
+                <a:spcPts val="800"/>
+              </a:spcAft>
+              <a:defRPr sz="1300" b="1">
+                <a:solidFill>
+                  <a:srgbClr val="38BDF8"/>
+                </a:solidFill>
+              </a:defRPr>
+            </a:pPr>
+            <a:r>
+              <a:t>Automated Verification Pipeline</a:t>
+            </a:r>
+          </a:p>
+          <a:p>
+            <a:pPr>
+              <a:spcAft>
+                <a:spcPts val="400"/>
+              </a:spcAft>
+              <a:defRPr sz="1100">
+                <a:solidFill>
+                  <a:srgbClr val="F8FAFC"/>
+                </a:solidFill>
+              </a:defRPr>
+            </a:pPr>
+            <a:r>
+              <a:t>• • Native C99 GCC Compilation (-O2 -Wall -std=c99): Zero errors across all subsystem modules.</a:t>
+            </a:r>
+          </a:p>
+          <a:p>
+            <a:pPr>
+              <a:spcAft>
+                <a:spcPts val="400"/>
+              </a:spcAft>
+              <a:defRPr sz="1100">
+                <a:solidFill>
+                  <a:srgbClr val="F8FAFC"/>
+                </a:solidFill>
+              </a:defRPr>
+            </a:pPr>
+            <a:r>
+              <a:t>• • Standalone Packaging Smoke Test (5/5 Stages Passed):</a:t>
+            </a:r>
+          </a:p>
+          <a:p>
+            <a:pPr>
+              <a:spcAft>
+                <a:spcPts val="400"/>
+              </a:spcAft>
+              <a:defRPr sz="1100">
+                <a:solidFill>
+                  <a:srgbClr val="F8FAFC"/>
+                </a:solidFill>
+              </a:defRPr>
+            </a:pPr>
+            <a:r>
+              <a:t>•   1. Extraction to clean temp directory: binary and assets verified.</a:t>
+            </a:r>
+          </a:p>
+          <a:p>
+            <a:pPr>
+              <a:spcAft>
+                <a:spcPts val="400"/>
+              </a:spcAft>
+              <a:defRPr sz="1100">
+                <a:solidFill>
+                  <a:srgbClr val="F8FAFC"/>
+                </a:solidFill>
+              </a:defRPr>
+            </a:pPr>
+            <a:r>
+              <a:t>•   2. Standalone launch on non-standard port (8098).</a:t>
+            </a:r>
+          </a:p>
+          <a:p>
+            <a:pPr>
+              <a:spcAft>
+                <a:spcPts val="400"/>
+              </a:spcAft>
+              <a:defRPr sz="1100">
+                <a:solidFill>
+                  <a:srgbClr val="F8FAFC"/>
+                </a:solidFill>
+              </a:defRPr>
+            </a:pPr>
+            <a:r>
+              <a:t>•   3. Win32 telemetry API live query verification.</a:t>
+            </a:r>
+          </a:p>
+          <a:p>
+            <a:pPr>
+              <a:spcAft>
+                <a:spcPts val="400"/>
+              </a:spcAft>
+              <a:defRPr sz="1100">
+                <a:solidFill>
+                  <a:srgbClr val="F8FAFC"/>
+                </a:solidFill>
+              </a:defRPr>
+            </a:pPr>
+            <a:r>
+              <a:t>•   4. Web asset delivery (HTTP 200 OK across HTML, CSS, JS).</a:t>
+            </a:r>
+          </a:p>
+          <a:p>
+            <a:pPr>
+              <a:spcAft>
+                <a:spcPts val="400"/>
+              </a:spcAft>
+              <a:defRPr sz="1100">
+                <a:solidFill>
+                  <a:srgbClr val="F8FAFC"/>
+                </a:solidFill>
+              </a:defRPr>
+            </a:pPr>
+            <a:r>
+              <a:t>•   5. Graceful termination and cleanup.</a:t>
+            </a:r>
+          </a:p>
+          <a:p>
+            <a:pPr>
+              <a:spcAft>
+                <a:spcPts val="400"/>
+              </a:spcAft>
+              <a:defRPr sz="1100">
+                <a:solidFill>
+                  <a:srgbClr val="F8FAFC"/>
+                </a:solidFill>
+              </a:defRPr>
+            </a:pPr>
+            <a:r>
+              <a:t>• • Leak-Proof Process Safety: Windows Job Objects ensure no orphaned Chrome processes remain.</a:t>
+            </a:r>
+          </a:p>
+        </p:txBody>
+      </p:sp>
+      <p:sp>
+        <p:nvSpPr>
+          <p:cNvPr id="8" name="Rounded Rectangle 7"/>
+          <p:cNvSpPr/>
+          <p:nvPr/>
+        </p:nvSpPr>
+        <p:spPr>
+          <a:xfrm>
+            <a:off x="6217920" y="1645920"/>
+            <a:ext cx="5212080" cy="4663440"/>
+          </a:xfrm>
+          <a:prstGeom prst="roundRect">
+            <a:avLst/>
+          </a:prstGeom>
+          <a:solidFill>
+            <a:srgbClr val="182136"/>
+          </a:solidFill>
+          <a:ln w="12700">
+            <a:solidFill>
+              <a:srgbClr val="334155"/>
+            </a:solidFill>
+          </a:ln>
+        </p:spPr>
+        <p:style>
+          <a:lnRef idx="1">
+            <a:schemeClr val="accent1"/>
+          </a:lnRef>
+          <a:fillRef idx="3">
+            <a:schemeClr val="accent1"/>
+          </a:fillRef>
+          <a:effectRef idx="2">
+            <a:schemeClr val="accent1"/>
+          </a:effectRef>
+          <a:fontRef idx="minor">
+            <a:schemeClr val="lt1"/>
+          </a:fontRef>
+        </p:style>
+        <p:txBody>
+          <a:bodyPr rtlCol="0" anchor="ctr"/>
+          <a:lstStyle/>
+          <a:p>
+            <a:pPr algn="ctr"/>
+          </a:p>
+        </p:txBody>
+      </p:sp>
+      <p:sp>
+        <p:nvSpPr>
+          <p:cNvPr id="9" name="TextBox 8"/>
+          <p:cNvSpPr txBox="1"/>
+          <p:nvPr/>
+        </p:nvSpPr>
+        <p:spPr>
+          <a:xfrm>
+            <a:off x="6400800" y="1783080"/>
+            <a:ext cx="4846320" cy="4389120"/>
+          </a:xfrm>
+          <a:prstGeom prst="rect">
+            <a:avLst/>
+          </a:prstGeom>
+          <a:noFill/>
+        </p:spPr>
+        <p:txBody>
+          <a:bodyPr wrap="square">
+            <a:spAutoFit/>
+          </a:bodyPr>
+          <a:lstStyle/>
+          <a:p>
+            <a:pPr>
+              <a:spcAft>
+                <a:spcPts val="800"/>
+              </a:spcAft>
+              <a:defRPr sz="1300" b="1">
+                <a:solidFill>
+                  <a:srgbClr val="10B981"/>
+                </a:solidFill>
+              </a:defRPr>
+            </a:pPr>
+            <a:r>
+              <a:t>Zero-Dependency Standalone Release</a:t>
+            </a:r>
+          </a:p>
+          <a:p>
+            <a:pPr>
+              <a:spcAft>
+                <a:spcPts val="400"/>
+              </a:spcAft>
+              <a:defRPr sz="1100">
+                <a:solidFill>
+                  <a:srgbClr val="F8FAFC"/>
+                </a:solidFill>
+              </a:defRPr>
+            </a:pPr>
+            <a:r>
+              <a:t>• • Self-Contained Binary: adaptive_scheduler.exe statically links all required Win32 APIs (ws2_32, shell32, advapi32).</a:t>
+            </a:r>
+          </a:p>
+          <a:p>
+            <a:pPr>
+              <a:spcAft>
+                <a:spcPts val="400"/>
+              </a:spcAft>
+              <a:defRPr sz="1100">
+                <a:solidFill>
+                  <a:srgbClr val="F8FAFC"/>
+                </a:solidFill>
+              </a:defRPr>
+            </a:pPr>
+            <a:r>
+              <a:t>• • Target Machine Requirements: Zero Python, zero Node.js, and zero build toolchains required on the professor's or student's laptop.</a:t>
+            </a:r>
+          </a:p>
+          <a:p>
+            <a:pPr>
+              <a:spcAft>
+                <a:spcPts val="400"/>
+              </a:spcAft>
+              <a:defRPr sz="1100">
+                <a:solidFill>
+                  <a:srgbClr val="F8FAFC"/>
+                </a:solidFill>
+              </a:defRPr>
+            </a:pPr>
+            <a:r>
+              <a:t>• • Run Anywhere: Simply extract the release ZIP and double-click adaptive_scheduler.exe.</a:t>
+            </a:r>
+          </a:p>
+          <a:p>
+            <a:pPr>
+              <a:spcAft>
+                <a:spcPts val="400"/>
+              </a:spcAft>
+              <a:defRPr sz="1100">
+                <a:solidFill>
+                  <a:srgbClr val="F8FAFC"/>
+                </a:solidFill>
+              </a:defRPr>
+            </a:pPr>
+            <a:r>
+              <a:t>• • Automatic Browser Launch: Automatically probes available local ports (8000-8024) and launches default web browser.</a:t>
+            </a:r>
+          </a:p>
+        </p:txBody>
+      </p:sp>
+    </p:spTree>
+  </p:cSld>
+  <p:clrMapOvr>
+    <a:masterClrMapping/>
+  </p:clrMapOvr>
+</p:sld>
+</file>
+
+<file path=ppt/slides/slide12.xml><?xml version="1.0" encoding="utf-8"?>
+<p:sld xmlns:a="http://schemas.openxmlformats.org/drawingml/2006/main" xmlns:p="http://schemas.openxmlformats.org/presentationml/2006/main" xmlns:r="http://schemas.openxmlformats.org/officeDocument/2006/relationships">
+  <p:cSld>
+    <p:spTree>
+      <p:nvGrpSpPr>
+        <p:cNvPr id="1" name=""/>
+        <p:cNvGrpSpPr/>
+        <p:nvPr/>
+      </p:nvGrpSpPr>
+      <p:grpSpPr/>
+      <p:sp>
+        <p:nvSpPr>
+          <p:cNvPr id="2" name="Rectangle 1"/>
+          <p:cNvSpPr/>
+          <p:nvPr/>
+        </p:nvSpPr>
+        <p:spPr>
+          <a:xfrm>
+            <a:off x="0" y="0"/>
+            <a:ext cx="12191695" cy="6858000"/>
+          </a:xfrm>
+          <a:prstGeom prst="rect">
+            <a:avLst/>
+          </a:prstGeom>
+          <a:solidFill>
+            <a:srgbClr val="0B1120"/>
+          </a:solidFill>
+          <a:ln>
+            <a:noFill/>
+          </a:ln>
+        </p:spPr>
+        <p:style>
+          <a:lnRef idx="1">
+            <a:schemeClr val="accent1"/>
+          </a:lnRef>
+          <a:fillRef idx="3">
+            <a:schemeClr val="accent1"/>
+          </a:fillRef>
+          <a:effectRef idx="2">
+            <a:schemeClr val="accent1"/>
+          </a:effectRef>
+          <a:fontRef idx="minor">
+            <a:schemeClr val="lt1"/>
+          </a:fontRef>
+        </p:style>
+        <p:txBody>
+          <a:bodyPr rtlCol="0" anchor="ctr"/>
+          <a:lstStyle/>
+          <a:p>
+            <a:pPr algn="ctr"/>
+          </a:p>
+        </p:txBody>
+      </p:sp>
+      <p:sp>
+        <p:nvSpPr>
+          <p:cNvPr id="3" name="TextBox 2"/>
+          <p:cNvSpPr txBox="1"/>
+          <p:nvPr/>
+        </p:nvSpPr>
+        <p:spPr>
+          <a:xfrm>
+            <a:off x="731520" y="365760"/>
+            <a:ext cx="7315200" cy="320040"/>
+          </a:xfrm>
+          <a:prstGeom prst="rect">
+            <a:avLst/>
+          </a:prstGeom>
+          <a:noFill/>
+        </p:spPr>
+        <p:txBody>
+          <a:bodyPr wrap="square">
+            <a:spAutoFit/>
+          </a:bodyPr>
+          <a:lstStyle/>
+          <a:p>
+            <a:pPr>
+              <a:defRPr sz="1000" b="1">
+                <a:solidFill>
+                  <a:srgbClr val="38BDF8"/>
+                </a:solidFill>
+              </a:defRPr>
+            </a:pPr>
+            <a:r>
+              <a:t>SUMMARY &amp; CONCLUSION</a:t>
+            </a:r>
+          </a:p>
+        </p:txBody>
+      </p:sp>
+      <p:sp>
+        <p:nvSpPr>
+          <p:cNvPr id="4" name="TextBox 3"/>
+          <p:cNvSpPr txBox="1"/>
+          <p:nvPr/>
+        </p:nvSpPr>
+        <p:spPr>
+          <a:xfrm>
+            <a:off x="731520" y="640080"/>
+            <a:ext cx="10698480" cy="502920"/>
+          </a:xfrm>
+          <a:prstGeom prst="rect">
+            <a:avLst/>
+          </a:prstGeom>
+          <a:noFill/>
+        </p:spPr>
+        <p:txBody>
+          <a:bodyPr wrap="square">
+            <a:spAutoFit/>
+          </a:bodyPr>
+          <a:lstStyle/>
+          <a:p>
+            <a:pPr>
+              <a:defRPr sz="2100" b="1">
+                <a:solidFill>
+                  <a:srgbClr val="F8FAFC"/>
+                </a:solidFill>
+              </a:defRPr>
+            </a:pPr>
+            <a:r>
+              <a:t>Key Takeaways &amp; Open-Source Academic Deliverables</a:t>
+            </a:r>
+          </a:p>
+        </p:txBody>
+      </p:sp>
+      <p:sp>
+        <p:nvSpPr>
+          <p:cNvPr id="5" name="TextBox 4"/>
+          <p:cNvSpPr txBox="1"/>
+          <p:nvPr/>
+        </p:nvSpPr>
+        <p:spPr>
+          <a:xfrm>
+            <a:off x="731520" y="1097280"/>
+            <a:ext cx="10698480" cy="365760"/>
+          </a:xfrm>
+          <a:prstGeom prst="rect">
+            <a:avLst/>
+          </a:prstGeom>
+          <a:noFill/>
+        </p:spPr>
+        <p:txBody>
+          <a:bodyPr wrap="square">
+            <a:spAutoFit/>
+          </a:bodyPr>
+          <a:lstStyle/>
+          <a:p>
+            <a:pPr>
+              <a:defRPr sz="1100">
+                <a:solidFill>
+                  <a:srgbClr val="94A3B8"/>
+                </a:solidFill>
+              </a:defRPr>
+            </a:pPr>
+            <a:r>
+              <a:t>Demonstrated results, engineering accomplishments, and public open-source repository.</a:t>
+            </a:r>
+          </a:p>
+        </p:txBody>
+      </p:sp>
+      <p:sp>
+        <p:nvSpPr>
+          <p:cNvPr id="6" name="Rounded Rectangle 5"/>
+          <p:cNvSpPr/>
+          <p:nvPr/>
+        </p:nvSpPr>
+        <p:spPr>
+          <a:xfrm>
+            <a:off x="731520" y="1645920"/>
+            <a:ext cx="5212080" cy="4663440"/>
+          </a:xfrm>
+          <a:prstGeom prst="roundRect">
+            <a:avLst/>
+          </a:prstGeom>
+          <a:solidFill>
+            <a:srgbClr val="182136"/>
+          </a:solidFill>
+          <a:ln w="12700">
+            <a:solidFill>
+              <a:srgbClr val="334155"/>
+            </a:solidFill>
+          </a:ln>
+        </p:spPr>
+        <p:style>
+          <a:lnRef idx="1">
+            <a:schemeClr val="accent1"/>
+          </a:lnRef>
+          <a:fillRef idx="3">
+            <a:schemeClr val="accent1"/>
+          </a:fillRef>
+          <a:effectRef idx="2">
+            <a:schemeClr val="accent1"/>
+          </a:effectRef>
+          <a:fontRef idx="minor">
+            <a:schemeClr val="lt1"/>
+          </a:fontRef>
+        </p:style>
+        <p:txBody>
+          <a:bodyPr rtlCol="0" anchor="ctr"/>
+          <a:lstStyle/>
+          <a:p>
+            <a:pPr algn="ctr"/>
+          </a:p>
+        </p:txBody>
+      </p:sp>
+      <p:sp>
+        <p:nvSpPr>
+          <p:cNvPr id="7" name="TextBox 6"/>
+          <p:cNvSpPr txBox="1"/>
+          <p:nvPr/>
+        </p:nvSpPr>
+        <p:spPr>
+          <a:xfrm>
+            <a:off x="914400" y="1783080"/>
+            <a:ext cx="4846320" cy="4389120"/>
+          </a:xfrm>
+          <a:prstGeom prst="rect">
+            <a:avLst/>
+          </a:prstGeom>
+          <a:noFill/>
+        </p:spPr>
+        <p:txBody>
+          <a:bodyPr wrap="square">
+            <a:spAutoFit/>
+          </a:bodyPr>
+          <a:lstStyle/>
+          <a:p>
+            <a:pPr>
+              <a:spcAft>
+                <a:spcPts val="800"/>
+              </a:spcAft>
+              <a:defRPr sz="1300" b="1">
+                <a:solidFill>
+                  <a:srgbClr val="38BDF8"/>
+                </a:solidFill>
+              </a:defRPr>
+            </a:pPr>
+            <a:r>
+              <a:t>Key Project Accomplishments</a:t>
+            </a:r>
+          </a:p>
+          <a:p>
+            <a:pPr>
+              <a:spcAft>
+                <a:spcPts val="400"/>
+              </a:spcAft>
+              <a:defRPr sz="1100">
+                <a:solidFill>
+                  <a:srgbClr val="F8FAFC"/>
+                </a:solidFill>
+              </a:defRPr>
+            </a:pPr>
+            <a:r>
+              <a:t>• 1. Full-Stack Native Implementation: C99 backend + embedded HTTP server + live browser frontend with zero external dependencies.</a:t>
+            </a:r>
+          </a:p>
+          <a:p>
+            <a:pPr>
+              <a:spcAft>
+                <a:spcPts val="400"/>
+              </a:spcAft>
+              <a:defRPr sz="1100">
+                <a:solidFill>
+                  <a:srgbClr val="F8FAFC"/>
+                </a:solidFill>
+              </a:defRPr>
+            </a:pPr>
+            <a:r>
+              <a:t>• 2. Real Application Validation: Moving beyond synthetic toys by measuring actual multi-process Google Chrome browser execution.</a:t>
+            </a:r>
+          </a:p>
+          <a:p>
+            <a:pPr>
+              <a:spcAft>
+                <a:spcPts val="400"/>
+              </a:spcAft>
+              <a:defRPr sz="1100">
+                <a:solidFill>
+                  <a:srgbClr val="F8FAFC"/>
+                </a:solidFill>
+              </a:defRPr>
+            </a:pPr>
+            <a:r>
+              <a:t>• 3. Live Preemption Demonstration: Visibly showing the Convoy Effect under FCFS and its resolution via Adaptive Priority modulation.</a:t>
+            </a:r>
+          </a:p>
+          <a:p>
+            <a:pPr>
+              <a:spcAft>
+                <a:spcPts val="400"/>
+              </a:spcAft>
+              <a:defRPr sz="1100">
+                <a:solidFill>
+                  <a:srgbClr val="F8FAFC"/>
+                </a:solidFill>
+              </a:defRPr>
+            </a:pPr>
+            <a:r>
+              <a:t>• 4. Academic Rigor: Truthful reporting, sub-microsecond QPC timing, and empirical validation of theoretical OS principles.</a:t>
+            </a:r>
+          </a:p>
+        </p:txBody>
+      </p:sp>
+      <p:sp>
+        <p:nvSpPr>
+          <p:cNvPr id="8" name="Rounded Rectangle 7"/>
+          <p:cNvSpPr/>
+          <p:nvPr/>
+        </p:nvSpPr>
+        <p:spPr>
+          <a:xfrm>
+            <a:off x="6217920" y="1645920"/>
+            <a:ext cx="5212080" cy="4663440"/>
+          </a:xfrm>
+          <a:prstGeom prst="roundRect">
+            <a:avLst/>
+          </a:prstGeom>
+          <a:solidFill>
+            <a:srgbClr val="182136"/>
+          </a:solidFill>
+          <a:ln w="12700">
+            <a:solidFill>
+              <a:srgbClr val="334155"/>
+            </a:solidFill>
+          </a:ln>
+        </p:spPr>
+        <p:style>
+          <a:lnRef idx="1">
+            <a:schemeClr val="accent1"/>
+          </a:lnRef>
+          <a:fillRef idx="3">
+            <a:schemeClr val="accent1"/>
+          </a:fillRef>
+          <a:effectRef idx="2">
+            <a:schemeClr val="accent1"/>
+          </a:effectRef>
+          <a:fontRef idx="minor">
+            <a:schemeClr val="lt1"/>
+          </a:fontRef>
+        </p:style>
+        <p:txBody>
+          <a:bodyPr rtlCol="0" anchor="ctr"/>
+          <a:lstStyle/>
+          <a:p>
+            <a:pPr algn="ctr"/>
+          </a:p>
+        </p:txBody>
+      </p:sp>
+      <p:sp>
+        <p:nvSpPr>
+          <p:cNvPr id="9" name="TextBox 8"/>
+          <p:cNvSpPr txBox="1"/>
+          <p:nvPr/>
+        </p:nvSpPr>
+        <p:spPr>
+          <a:xfrm>
+            <a:off x="6400800" y="1783080"/>
+            <a:ext cx="4846320" cy="4389120"/>
+          </a:xfrm>
+          <a:prstGeom prst="rect">
+            <a:avLst/>
+          </a:prstGeom>
+          <a:noFill/>
+        </p:spPr>
+        <p:txBody>
+          <a:bodyPr wrap="square">
+            <a:spAutoFit/>
+          </a:bodyPr>
+          <a:lstStyle/>
+          <a:p>
+            <a:pPr>
+              <a:spcAft>
+                <a:spcPts val="800"/>
+              </a:spcAft>
+              <a:defRPr sz="1300" b="1">
+                <a:solidFill>
+                  <a:srgbClr val="10B981"/>
+                </a:solidFill>
+              </a:defRPr>
+            </a:pPr>
+            <a:r>
+              <a:t>Public Deliverables &amp; GitHub Release</a:t>
+            </a:r>
+          </a:p>
+          <a:p>
+            <a:pPr>
+              <a:spcAft>
+                <a:spcPts val="400"/>
+              </a:spcAft>
+              <a:defRPr sz="1100">
+                <a:solidFill>
+                  <a:srgbClr val="F8FAFC"/>
+                </a:solidFill>
+              </a:defRPr>
+            </a:pPr>
+            <a:r>
+              <a:t>• • Standalone Release ZIP: Portable package containing adaptive_scheduler.exe and web assets.</a:t>
+            </a:r>
+          </a:p>
+          <a:p>
+            <a:pPr>
+              <a:spcAft>
+                <a:spcPts val="400"/>
+              </a:spcAft>
+              <a:defRPr sz="1100">
+                <a:solidFill>
+                  <a:srgbClr val="F8FAFC"/>
+                </a:solidFill>
+              </a:defRPr>
+            </a:pPr>
+            <a:r>
               <a:t>• • Public GitHub Repository: Fully open-sourced at:</a:t>
             </a:r>
           </a:p>
           <a:p>
             <a:pPr>
               <a:spcAft>
-                <a:spcPts val="600"/>
+                <a:spcPts val="400"/>
               </a:spcAft>
               <a:defRPr sz="1100">
                 <a:solidFill>
@@ -3997,7 +4978,7 @@
           <a:p>
             <a:pPr>
               <a:spcAft>
-                <a:spcPts val="600"/>
+                <a:spcPts val="400"/>
               </a:spcAft>
               <a:defRPr sz="1100">
                 <a:solidFill>
@@ -4006,13 +4987,13 @@
               </a:defRPr>
             </a:pPr>
             <a:r>
-              <a:t>• • Tagged Release v0.1.0 with attached precompiled portable binaries.</a:t>
-            </a:r>
-          </a:p>
-          <a:p>
-            <a:pPr>
-              <a:spcAft>
-                <a:spcPts val="600"/>
+              <a:t>• • Tagged Release v0.1.0 with attached precompiled portable binaries and presentation deck.</a:t>
+            </a:r>
+          </a:p>
+          <a:p>
+            <a:pPr>
+              <a:spcAft>
+                <a:spcPts val="400"/>
               </a:spcAft>
               <a:defRPr sz="1100">
                 <a:solidFill>
@@ -4131,7 +5112,7 @@
         <p:spPr>
           <a:xfrm>
             <a:off x="731520" y="640080"/>
-            <a:ext cx="10698480" cy="548640"/>
+            <a:ext cx="10698480" cy="502920"/>
           </a:xfrm>
           <a:prstGeom prst="rect">
             <a:avLst/>
@@ -4145,7 +5126,7 @@
           <a:lstStyle/>
           <a:p>
             <a:pPr>
-              <a:defRPr sz="2200" b="1">
+              <a:defRPr sz="2100" b="1">
                 <a:solidFill>
                   <a:srgbClr val="F8FAFC"/>
                 </a:solidFill>
@@ -4165,7 +5146,7 @@
         </p:nvSpPr>
         <p:spPr>
           <a:xfrm>
-            <a:off x="731520" y="1143000"/>
+            <a:off x="731520" y="1097280"/>
             <a:ext cx="10698480" cy="365760"/>
           </a:xfrm>
           <a:prstGeom prst="rect">
@@ -4180,7 +5161,7 @@
           <a:lstStyle/>
           <a:p>
             <a:pPr>
-              <a:defRPr sz="1200">
+              <a:defRPr sz="1100">
                 <a:solidFill>
                   <a:srgbClr val="94A3B8"/>
                 </a:solidFill>
@@ -4201,7 +5182,7 @@
         <p:spPr>
           <a:xfrm>
             <a:off x="731520" y="1645920"/>
-            <a:ext cx="5212080" cy="4572000"/>
+            <a:ext cx="5212080" cy="4663440"/>
           </a:xfrm>
           <a:prstGeom prst="roundRect">
             <a:avLst/>
@@ -4245,8 +5226,8 @@
         </p:nvSpPr>
         <p:spPr>
           <a:xfrm>
-            <a:off x="960120" y="1828800"/>
-            <a:ext cx="4754880" cy="4206240"/>
+            <a:off x="914400" y="1783080"/>
+            <a:ext cx="4846320" cy="4389120"/>
           </a:xfrm>
           <a:prstGeom prst="rect">
             <a:avLst/>
@@ -4261,9 +5242,9 @@
           <a:p>
             <a:pPr>
               <a:spcAft>
-                <a:spcPts val="1000"/>
-              </a:spcAft>
-              <a:defRPr sz="1400" b="1">
+                <a:spcPts val="800"/>
+              </a:spcAft>
+              <a:defRPr sz="1300" b="1">
                 <a:solidFill>
                   <a:srgbClr val="F59E0B"/>
                 </a:solidFill>
@@ -4276,7 +5257,7 @@
           <a:p>
             <a:pPr>
               <a:spcAft>
-                <a:spcPts val="600"/>
+                <a:spcPts val="400"/>
               </a:spcAft>
               <a:defRPr sz="1100">
                 <a:solidFill>
@@ -4291,7 +5272,7 @@
           <a:p>
             <a:pPr>
               <a:spcAft>
-                <a:spcPts val="600"/>
+                <a:spcPts val="400"/>
               </a:spcAft>
               <a:defRPr sz="1100">
                 <a:solidFill>
@@ -4306,7 +5287,7 @@
           <a:p>
             <a:pPr>
               <a:spcAft>
-                <a:spcPts val="600"/>
+                <a:spcPts val="400"/>
               </a:spcAft>
               <a:defRPr sz="1100">
                 <a:solidFill>
@@ -4321,7 +5302,7 @@
           <a:p>
             <a:pPr>
               <a:spcAft>
-                <a:spcPts val="600"/>
+                <a:spcPts val="400"/>
               </a:spcAft>
               <a:defRPr sz="1100">
                 <a:solidFill>
@@ -4344,7 +5325,7 @@
         <p:spPr>
           <a:xfrm>
             <a:off x="6217920" y="1645920"/>
-            <a:ext cx="5212080" cy="4572000"/>
+            <a:ext cx="5212080" cy="4663440"/>
           </a:xfrm>
           <a:prstGeom prst="roundRect">
             <a:avLst/>
@@ -4388,8 +5369,8 @@
         </p:nvSpPr>
         <p:spPr>
           <a:xfrm>
-            <a:off x="6446520" y="1828800"/>
-            <a:ext cx="4754880" cy="4206240"/>
+            <a:off x="6400800" y="1783080"/>
+            <a:ext cx="4846320" cy="4389120"/>
           </a:xfrm>
           <a:prstGeom prst="rect">
             <a:avLst/>
@@ -4404,9 +5385,9 @@
           <a:p>
             <a:pPr>
               <a:spcAft>
-                <a:spcPts val="1000"/>
-              </a:spcAft>
-              <a:defRPr sz="1400" b="1">
+                <a:spcPts val="800"/>
+              </a:spcAft>
+              <a:defRPr sz="1300" b="1">
                 <a:solidFill>
                   <a:srgbClr val="38BDF8"/>
                 </a:solidFill>
@@ -4419,7 +5400,7 @@
           <a:p>
             <a:pPr>
               <a:spcAft>
-                <a:spcPts val="600"/>
+                <a:spcPts val="400"/>
               </a:spcAft>
               <a:defRPr sz="1100">
                 <a:solidFill>
@@ -4434,7 +5415,7 @@
           <a:p>
             <a:pPr>
               <a:spcAft>
-                <a:spcPts val="600"/>
+                <a:spcPts val="400"/>
               </a:spcAft>
               <a:defRPr sz="1100">
                 <a:solidFill>
@@ -4449,7 +5430,7 @@
           <a:p>
             <a:pPr>
               <a:spcAft>
-                <a:spcPts val="600"/>
+                <a:spcPts val="400"/>
               </a:spcAft>
               <a:defRPr sz="1100">
                 <a:solidFill>
@@ -4464,7 +5445,7 @@
           <a:p>
             <a:pPr>
               <a:spcAft>
-                <a:spcPts val="600"/>
+                <a:spcPts val="400"/>
               </a:spcAft>
               <a:defRPr sz="1100">
                 <a:solidFill>
@@ -4479,7 +5460,7 @@
           <a:p>
             <a:pPr>
               <a:spcAft>
-                <a:spcPts val="600"/>
+                <a:spcPts val="400"/>
               </a:spcAft>
               <a:defRPr sz="1100">
                 <a:solidFill>
@@ -4598,7 +5579,7 @@
         <p:spPr>
           <a:xfrm>
             <a:off x="731520" y="640080"/>
-            <a:ext cx="10698480" cy="548640"/>
+            <a:ext cx="10698480" cy="502920"/>
           </a:xfrm>
           <a:prstGeom prst="rect">
             <a:avLst/>
@@ -4612,7 +5593,7 @@
           <a:lstStyle/>
           <a:p>
             <a:pPr>
-              <a:defRPr sz="2200" b="1">
+              <a:defRPr sz="2100" b="1">
                 <a:solidFill>
                   <a:srgbClr val="F8FAFC"/>
                 </a:solidFill>
@@ -4632,7 +5613,7 @@
         </p:nvSpPr>
         <p:spPr>
           <a:xfrm>
-            <a:off x="731520" y="1143000"/>
+            <a:off x="731520" y="1097280"/>
             <a:ext cx="10698480" cy="365760"/>
           </a:xfrm>
           <a:prstGeom prst="rect">
@@ -4647,7 +5628,7 @@
           <a:lstStyle/>
           <a:p>
             <a:pPr>
-              <a:defRPr sz="1200">
+              <a:defRPr sz="1100">
                 <a:solidFill>
                   <a:srgbClr val="94A3B8"/>
                 </a:solidFill>
@@ -4668,7 +5649,7 @@
         <p:spPr>
           <a:xfrm>
             <a:off x="731520" y="1645920"/>
-            <a:ext cx="3383280" cy="4572000"/>
+            <a:ext cx="3383280" cy="4663440"/>
           </a:xfrm>
           <a:prstGeom prst="roundRect">
             <a:avLst/>
@@ -4712,8 +5693,8 @@
         </p:nvSpPr>
         <p:spPr>
           <a:xfrm>
-            <a:off x="960120" y="1828800"/>
-            <a:ext cx="2926080" cy="4206240"/>
+            <a:off x="914400" y="1783080"/>
+            <a:ext cx="3017520" cy="4389120"/>
           </a:xfrm>
           <a:prstGeom prst="rect">
             <a:avLst/>
@@ -4728,9 +5709,9 @@
           <a:p>
             <a:pPr>
               <a:spcAft>
-                <a:spcPts val="1000"/>
-              </a:spcAft>
-              <a:defRPr sz="1400" b="1">
+                <a:spcPts val="800"/>
+              </a:spcAft>
+              <a:defRPr sz="1300" b="1">
                 <a:solidFill>
                   <a:srgbClr val="F59E0B"/>
                 </a:solidFill>
@@ -4743,7 +5724,7 @@
           <a:p>
             <a:pPr>
               <a:spcAft>
-                <a:spcPts val="600"/>
+                <a:spcPts val="400"/>
               </a:spcAft>
               <a:defRPr sz="1100">
                 <a:solidFill>
@@ -4758,7 +5739,7 @@
           <a:p>
             <a:pPr>
               <a:spcAft>
-                <a:spcPts val="600"/>
+                <a:spcPts val="400"/>
               </a:spcAft>
               <a:defRPr sz="1100">
                 <a:solidFill>
@@ -4773,7 +5754,7 @@
           <a:p>
             <a:pPr>
               <a:spcAft>
-                <a:spcPts val="600"/>
+                <a:spcPts val="400"/>
               </a:spcAft>
               <a:defRPr sz="1100">
                 <a:solidFill>
@@ -4788,7 +5769,7 @@
           <a:p>
             <a:pPr>
               <a:spcAft>
-                <a:spcPts val="600"/>
+                <a:spcPts val="400"/>
               </a:spcAft>
               <a:defRPr sz="1100">
                 <a:solidFill>
@@ -4811,7 +5792,7 @@
         <p:spPr>
           <a:xfrm>
             <a:off x="4389120" y="1645920"/>
-            <a:ext cx="3383280" cy="4572000"/>
+            <a:ext cx="3383280" cy="4663440"/>
           </a:xfrm>
           <a:prstGeom prst="roundRect">
             <a:avLst/>
@@ -4855,8 +5836,8 @@
         </p:nvSpPr>
         <p:spPr>
           <a:xfrm>
-            <a:off x="4617720" y="1828800"/>
-            <a:ext cx="2926080" cy="4206240"/>
+            <a:off x="4572000" y="1783080"/>
+            <a:ext cx="3017520" cy="4389120"/>
           </a:xfrm>
           <a:prstGeom prst="rect">
             <a:avLst/>
@@ -4871,9 +5852,9 @@
           <a:p>
             <a:pPr>
               <a:spcAft>
-                <a:spcPts val="1000"/>
-              </a:spcAft>
-              <a:defRPr sz="1400" b="1">
+                <a:spcPts val="800"/>
+              </a:spcAft>
+              <a:defRPr sz="1300" b="1">
                 <a:solidFill>
                   <a:srgbClr val="38BDF8"/>
                 </a:solidFill>
@@ -4886,7 +5867,7 @@
           <a:p>
             <a:pPr>
               <a:spcAft>
-                <a:spcPts val="600"/>
+                <a:spcPts val="400"/>
               </a:spcAft>
               <a:defRPr sz="1100">
                 <a:solidFill>
@@ -4901,7 +5882,7 @@
           <a:p>
             <a:pPr>
               <a:spcAft>
-                <a:spcPts val="600"/>
+                <a:spcPts val="400"/>
               </a:spcAft>
               <a:defRPr sz="1100">
                 <a:solidFill>
@@ -4916,7 +5897,7 @@
           <a:p>
             <a:pPr>
               <a:spcAft>
-                <a:spcPts val="600"/>
+                <a:spcPts val="400"/>
               </a:spcAft>
               <a:defRPr sz="1100">
                 <a:solidFill>
@@ -4931,7 +5912,7 @@
           <a:p>
             <a:pPr>
               <a:spcAft>
-                <a:spcPts val="600"/>
+                <a:spcPts val="400"/>
               </a:spcAft>
               <a:defRPr sz="1100">
                 <a:solidFill>
@@ -4954,7 +5935,7 @@
         <p:spPr>
           <a:xfrm>
             <a:off x="8046720" y="1645920"/>
-            <a:ext cx="3383280" cy="4572000"/>
+            <a:ext cx="3383280" cy="4663440"/>
           </a:xfrm>
           <a:prstGeom prst="roundRect">
             <a:avLst/>
@@ -4998,8 +5979,8 @@
         </p:nvSpPr>
         <p:spPr>
           <a:xfrm>
-            <a:off x="8275320" y="1828800"/>
-            <a:ext cx="2926080" cy="4206240"/>
+            <a:off x="8229600" y="1783080"/>
+            <a:ext cx="3017520" cy="4389120"/>
           </a:xfrm>
           <a:prstGeom prst="rect">
             <a:avLst/>
@@ -5014,9 +5995,9 @@
           <a:p>
             <a:pPr>
               <a:spcAft>
-                <a:spcPts val="1000"/>
-              </a:spcAft>
-              <a:defRPr sz="1400" b="1">
+                <a:spcPts val="800"/>
+              </a:spcAft>
+              <a:defRPr sz="1300" b="1">
                 <a:solidFill>
                   <a:srgbClr val="10B981"/>
                 </a:solidFill>
@@ -5029,7 +6010,7 @@
           <a:p>
             <a:pPr>
               <a:spcAft>
-                <a:spcPts val="600"/>
+                <a:spcPts val="400"/>
               </a:spcAft>
               <a:defRPr sz="1100">
                 <a:solidFill>
@@ -5044,7 +6025,7 @@
           <a:p>
             <a:pPr>
               <a:spcAft>
-                <a:spcPts val="600"/>
+                <a:spcPts val="400"/>
               </a:spcAft>
               <a:defRPr sz="1100">
                 <a:solidFill>
@@ -5059,7 +6040,7 @@
           <a:p>
             <a:pPr>
               <a:spcAft>
-                <a:spcPts val="600"/>
+                <a:spcPts val="400"/>
               </a:spcAft>
               <a:defRPr sz="1100">
                 <a:solidFill>
@@ -5074,7 +6055,7 @@
           <a:p>
             <a:pPr>
               <a:spcAft>
-                <a:spcPts val="600"/>
+                <a:spcPts val="400"/>
               </a:spcAft>
               <a:defRPr sz="1100">
                 <a:solidFill>
@@ -5193,7 +6174,7 @@
         <p:spPr>
           <a:xfrm>
             <a:off x="731520" y="640080"/>
-            <a:ext cx="10698480" cy="548640"/>
+            <a:ext cx="10698480" cy="502920"/>
           </a:xfrm>
           <a:prstGeom prst="rect">
             <a:avLst/>
@@ -5207,7 +6188,7 @@
           <a:lstStyle/>
           <a:p>
             <a:pPr>
-              <a:defRPr sz="2200" b="1">
+              <a:defRPr sz="2100" b="1">
                 <a:solidFill>
                   <a:srgbClr val="F8FAFC"/>
                 </a:solidFill>
@@ -5227,7 +6208,7 @@
         </p:nvSpPr>
         <p:spPr>
           <a:xfrm>
-            <a:off x="731520" y="1143000"/>
+            <a:off x="731520" y="1097280"/>
             <a:ext cx="10698480" cy="365760"/>
           </a:xfrm>
           <a:prstGeom prst="rect">
@@ -5242,7 +6223,7 @@
           <a:lstStyle/>
           <a:p>
             <a:pPr>
-              <a:defRPr sz="1200">
+              <a:defRPr sz="1100">
                 <a:solidFill>
                   <a:srgbClr val="94A3B8"/>
                 </a:solidFill>
@@ -5307,8 +6288,8 @@
         </p:nvSpPr>
         <p:spPr>
           <a:xfrm>
-            <a:off x="960120" y="1828800"/>
-            <a:ext cx="4754880" cy="1828800"/>
+            <a:off x="914400" y="1783080"/>
+            <a:ext cx="4846320" cy="1920240"/>
           </a:xfrm>
           <a:prstGeom prst="rect">
             <a:avLst/>
@@ -5323,9 +6304,9 @@
           <a:p>
             <a:pPr>
               <a:spcAft>
-                <a:spcPts val="1000"/>
-              </a:spcAft>
-              <a:defRPr sz="1400" b="1">
+                <a:spcPts val="800"/>
+              </a:spcAft>
+              <a:defRPr sz="1300" b="1">
                 <a:solidFill>
                   <a:srgbClr val="38BDF8"/>
                 </a:solidFill>
@@ -5338,7 +6319,7 @@
           <a:p>
             <a:pPr>
               <a:spcAft>
-                <a:spcPts val="600"/>
+                <a:spcPts val="400"/>
               </a:spcAft>
               <a:defRPr sz="1100">
                 <a:solidFill>
@@ -5353,7 +6334,7 @@
           <a:p>
             <a:pPr>
               <a:spcAft>
-                <a:spcPts val="600"/>
+                <a:spcPts val="400"/>
               </a:spcAft>
               <a:defRPr sz="1100">
                 <a:solidFill>
@@ -5368,7 +6349,7 @@
           <a:p>
             <a:pPr>
               <a:spcAft>
-                <a:spcPts val="600"/>
+                <a:spcPts val="400"/>
               </a:spcAft>
               <a:defRPr sz="1100">
                 <a:solidFill>
@@ -5391,7 +6372,7 @@
         <p:spPr>
           <a:xfrm>
             <a:off x="731520" y="4023360"/>
-            <a:ext cx="5212080" cy="2194560"/>
+            <a:ext cx="5212080" cy="2286000"/>
           </a:xfrm>
           <a:prstGeom prst="roundRect">
             <a:avLst/>
@@ -5435,8 +6416,8 @@
         </p:nvSpPr>
         <p:spPr>
           <a:xfrm>
-            <a:off x="960120" y="4206240"/>
-            <a:ext cx="4754880" cy="1828800"/>
+            <a:off x="914400" y="4160520"/>
+            <a:ext cx="4846320" cy="2011680"/>
           </a:xfrm>
           <a:prstGeom prst="rect">
             <a:avLst/>
@@ -5451,9 +6432,9 @@
           <a:p>
             <a:pPr>
               <a:spcAft>
-                <a:spcPts val="1000"/>
-              </a:spcAft>
-              <a:defRPr sz="1400" b="1">
+                <a:spcPts val="800"/>
+              </a:spcAft>
+              <a:defRPr sz="1300" b="1">
                 <a:solidFill>
                   <a:srgbClr val="10B981"/>
                 </a:solidFill>
@@ -5466,7 +6447,7 @@
           <a:p>
             <a:pPr>
               <a:spcAft>
-                <a:spcPts val="600"/>
+                <a:spcPts val="400"/>
               </a:spcAft>
               <a:defRPr sz="1100">
                 <a:solidFill>
@@ -5481,7 +6462,7 @@
           <a:p>
             <a:pPr>
               <a:spcAft>
-                <a:spcPts val="600"/>
+                <a:spcPts val="400"/>
               </a:spcAft>
               <a:defRPr sz="1100">
                 <a:solidFill>
@@ -5496,7 +6477,7 @@
           <a:p>
             <a:pPr>
               <a:spcAft>
-                <a:spcPts val="600"/>
+                <a:spcPts val="400"/>
               </a:spcAft>
               <a:defRPr sz="1100">
                 <a:solidFill>
@@ -5519,7 +6500,7 @@
         <p:spPr>
           <a:xfrm>
             <a:off x="6217920" y="1645920"/>
-            <a:ext cx="5212080" cy="4572000"/>
+            <a:ext cx="5212080" cy="4663440"/>
           </a:xfrm>
           <a:prstGeom prst="roundRect">
             <a:avLst/>
@@ -5563,8 +6544,8 @@
         </p:nvSpPr>
         <p:spPr>
           <a:xfrm>
-            <a:off x="6446520" y="1828800"/>
-            <a:ext cx="4754880" cy="4206240"/>
+            <a:off x="6400800" y="1783080"/>
+            <a:ext cx="4846320" cy="4389120"/>
           </a:xfrm>
           <a:prstGeom prst="rect">
             <a:avLst/>
@@ -5579,9 +6560,9 @@
           <a:p>
             <a:pPr>
               <a:spcAft>
-                <a:spcPts val="1000"/>
-              </a:spcAft>
-              <a:defRPr sz="1400" b="1">
+                <a:spcPts val="800"/>
+              </a:spcAft>
+              <a:defRPr sz="1300" b="1">
                 <a:solidFill>
                   <a:srgbClr val="38BDF8"/>
                 </a:solidFill>
@@ -5594,7 +6575,7 @@
           <a:p>
             <a:pPr>
               <a:spcAft>
-                <a:spcPts val="600"/>
+                <a:spcPts val="400"/>
               </a:spcAft>
               <a:defRPr sz="1100">
                 <a:solidFill>
@@ -5609,7 +6590,7 @@
           <a:p>
             <a:pPr>
               <a:spcAft>
-                <a:spcPts val="600"/>
+                <a:spcPts val="400"/>
               </a:spcAft>
               <a:defRPr sz="1100">
                 <a:solidFill>
@@ -5624,7 +6605,7 @@
           <a:p>
             <a:pPr>
               <a:spcAft>
-                <a:spcPts val="600"/>
+                <a:spcPts val="400"/>
               </a:spcAft>
               <a:defRPr sz="1100">
                 <a:solidFill>
@@ -5639,7 +6620,7 @@
           <a:p>
             <a:pPr>
               <a:spcAft>
-                <a:spcPts val="600"/>
+                <a:spcPts val="400"/>
               </a:spcAft>
               <a:defRPr sz="1100">
                 <a:solidFill>
@@ -5654,7 +6635,7 @@
           <a:p>
             <a:pPr>
               <a:spcAft>
-                <a:spcPts val="600"/>
+                <a:spcPts val="400"/>
               </a:spcAft>
               <a:defRPr sz="1100">
                 <a:solidFill>
@@ -5669,7 +6650,7 @@
           <a:p>
             <a:pPr>
               <a:spcAft>
-                <a:spcPts val="600"/>
+                <a:spcPts val="400"/>
               </a:spcAft>
               <a:defRPr sz="1100">
                 <a:solidFill>
@@ -5684,7 +6665,7 @@
           <a:p>
             <a:pPr>
               <a:spcAft>
-                <a:spcPts val="600"/>
+                <a:spcPts val="400"/>
               </a:spcAft>
               <a:defRPr sz="1100">
                 <a:solidFill>
@@ -5803,7 +6784,7 @@
         <p:spPr>
           <a:xfrm>
             <a:off x="731520" y="640080"/>
-            <a:ext cx="10698480" cy="548640"/>
+            <a:ext cx="10698480" cy="502920"/>
           </a:xfrm>
           <a:prstGeom prst="rect">
             <a:avLst/>
@@ -5817,14 +6798,14 @@
           <a:lstStyle/>
           <a:p>
             <a:pPr>
-              <a:defRPr sz="2200" b="1">
-                <a:solidFill>
-                  <a:srgbClr val="F8FAFC"/>
-                </a:solidFill>
-              </a:defRPr>
-            </a:pPr>
-            <a:r>
-              <a:t>Experiment 1: 10-Tab Browser Contention Test</a:t>
+              <a:defRPr sz="2100" b="1">
+                <a:solidFill>
+                  <a:srgbClr val="F8FAFC"/>
+                </a:solidFill>
+              </a:defRPr>
+            </a:pPr>
+            <a:r>
+              <a:t>Experiment 1: 10-Tab Browser Contention Architecture</a:t>
             </a:r>
           </a:p>
         </p:txBody>
@@ -5837,7 +6818,7 @@
         </p:nvSpPr>
         <p:spPr>
           <a:xfrm>
-            <a:off x="731520" y="1143000"/>
+            <a:off x="731520" y="1097280"/>
             <a:ext cx="10698480" cy="365760"/>
           </a:xfrm>
           <a:prstGeom prst="rect">
@@ -5852,14 +6833,14 @@
           <a:lstStyle/>
           <a:p>
             <a:pPr>
-              <a:defRPr sz="1200">
+              <a:defRPr sz="1100">
                 <a:solidFill>
                   <a:srgbClr val="94A3B8"/>
                 </a:solidFill>
               </a:defRPr>
             </a:pPr>
             <a:r>
-              <a:t>Evaluating real browser responsiveness during hardware-saturating background cryptographic hashing.</a:t>
+              <a:t>Real-time orchestration interface executing hardware-saturating background threads and Chrome tabs.</a:t>
             </a:r>
           </a:p>
         </p:txBody>
@@ -5873,7 +6854,7 @@
         <p:spPr>
           <a:xfrm>
             <a:off x="731520" y="1645920"/>
-            <a:ext cx="3383280" cy="4572000"/>
+            <a:ext cx="4389120" cy="2194560"/>
           </a:xfrm>
           <a:prstGeom prst="roundRect">
             <a:avLst/>
@@ -5917,8 +6898,8 @@
         </p:nvSpPr>
         <p:spPr>
           <a:xfrm>
-            <a:off x="960120" y="1828800"/>
-            <a:ext cx="2926080" cy="4206240"/>
+            <a:off x="914400" y="1783080"/>
+            <a:ext cx="4023359" cy="1920240"/>
           </a:xfrm>
           <a:prstGeom prst="rect">
             <a:avLst/>
@@ -5933,9 +6914,9 @@
           <a:p>
             <a:pPr>
               <a:spcAft>
-                <a:spcPts val="1000"/>
-              </a:spcAft>
-              <a:defRPr sz="1400" b="1">
+                <a:spcPts val="800"/>
+              </a:spcAft>
+              <a:defRPr sz="1200" b="1">
                 <a:solidFill>
                   <a:srgbClr val="F59E0B"/>
                 </a:solidFill>
@@ -5948,61 +6929,46 @@
           <a:p>
             <a:pPr>
               <a:spcAft>
-                <a:spcPts val="600"/>
-              </a:spcAft>
-              <a:defRPr sz="1100">
-                <a:solidFill>
-                  <a:srgbClr val="F8FAFC"/>
-                </a:solidFill>
-              </a:defRPr>
-            </a:pPr>
-            <a:r>
-              <a:t>• Native C engine spawns concurrent worker threads matching host logical cores (e.g. 24 threads on Intel i7-13700HX).</a:t>
-            </a:r>
-          </a:p>
-          <a:p>
-            <a:pPr>
-              <a:spcAft>
-                <a:spcPts val="600"/>
-              </a:spcAft>
-              <a:defRPr sz="1100">
-                <a:solidFill>
-                  <a:srgbClr val="F8FAFC"/>
-                </a:solidFill>
-              </a:defRPr>
-            </a:pPr>
-            <a:r>
-              <a:t>• Workers execute continuous loops of pseudo-SHA-256 and matrix multiplication.</a:t>
-            </a:r>
-          </a:p>
-          <a:p>
-            <a:pPr>
-              <a:spcAft>
-                <a:spcPts val="600"/>
-              </a:spcAft>
-              <a:defRPr sz="1100">
-                <a:solidFill>
-                  <a:srgbClr val="F8FAFC"/>
-                </a:solidFill>
-              </a:defRPr>
-            </a:pPr>
-            <a:r>
-              <a:t>• Zero sleep calls: saturates all cores to generate genuine, continuous CPU contention.</a:t>
-            </a:r>
-          </a:p>
-          <a:p>
-            <a:pPr>
-              <a:spcAft>
-                <a:spcPts val="600"/>
-              </a:spcAft>
-              <a:defRPr sz="1100">
-                <a:solidFill>
-                  <a:srgbClr val="F8FAFC"/>
-                </a:solidFill>
-              </a:defRPr>
-            </a:pPr>
-            <a:r>
-              <a:t>• Tracks completed hash rounds into the billions.</a:t>
+                <a:spcPts val="400"/>
+              </a:spcAft>
+              <a:defRPr sz="1000">
+                <a:solidFill>
+                  <a:srgbClr val="F8FAFC"/>
+                </a:solidFill>
+              </a:defRPr>
+            </a:pPr>
+            <a:r>
+              <a:t>• Spawns 24 concurrent worker threads matching host logical processors.</a:t>
+            </a:r>
+          </a:p>
+          <a:p>
+            <a:pPr>
+              <a:spcAft>
+                <a:spcPts val="400"/>
+              </a:spcAft>
+              <a:defRPr sz="1000">
+                <a:solidFill>
+                  <a:srgbClr val="F8FAFC"/>
+                </a:solidFill>
+              </a:defRPr>
+            </a:pPr>
+            <a:r>
+              <a:t>• Continuous pseudo-SHA256 &amp; matrix arithmetic rounds without sleep.</a:t>
+            </a:r>
+          </a:p>
+          <a:p>
+            <a:pPr>
+              <a:spcAft>
+                <a:spcPts val="400"/>
+              </a:spcAft>
+              <a:defRPr sz="1000">
+                <a:solidFill>
+                  <a:srgbClr val="F8FAFC"/>
+                </a:solidFill>
+              </a:defRPr>
+            </a:pPr>
+            <a:r>
+              <a:t>• Generates genuine CPU core saturation and thread queue contention.</a:t>
             </a:r>
           </a:p>
         </p:txBody>
@@ -6015,8 +6981,8 @@
         </p:nvSpPr>
         <p:spPr>
           <a:xfrm>
-            <a:off x="4389120" y="1645920"/>
-            <a:ext cx="3383280" cy="4572000"/>
+            <a:off x="731520" y="4023360"/>
+            <a:ext cx="4389120" cy="2286000"/>
           </a:xfrm>
           <a:prstGeom prst="roundRect">
             <a:avLst/>
@@ -6060,8 +7026,8 @@
         </p:nvSpPr>
         <p:spPr>
           <a:xfrm>
-            <a:off x="4617720" y="1828800"/>
-            <a:ext cx="2926080" cy="4206240"/>
+            <a:off x="914400" y="4160520"/>
+            <a:ext cx="4023359" cy="2011680"/>
           </a:xfrm>
           <a:prstGeom prst="rect">
             <a:avLst/>
@@ -6076,76 +7042,61 @@
           <a:p>
             <a:pPr>
               <a:spcAft>
-                <a:spcPts val="1000"/>
-              </a:spcAft>
-              <a:defRPr sz="1400" b="1">
+                <a:spcPts val="800"/>
+              </a:spcAft>
+              <a:defRPr sz="1200" b="1">
                 <a:solidFill>
                   <a:srgbClr val="38BDF8"/>
                 </a:solidFill>
               </a:defRPr>
             </a:pPr>
             <a:r>
-              <a:t>2. Isolated Multi-Tab Launch</a:t>
-            </a:r>
-          </a:p>
-          <a:p>
-            <a:pPr>
-              <a:spcAft>
-                <a:spcPts val="600"/>
-              </a:spcAft>
-              <a:defRPr sz="1100">
-                <a:solidFill>
-                  <a:srgbClr val="F8FAFC"/>
-                </a:solidFill>
-              </a:defRPr>
-            </a:pPr>
-            <a:r>
-              <a:t>• Spawns Google Chrome or Microsoft Edge in an isolated temporary profile (%TEMP%\sched_browser_test_*).</a:t>
-            </a:r>
-          </a:p>
-          <a:p>
-            <a:pPr>
-              <a:spcAft>
-                <a:spcPts val="600"/>
-              </a:spcAft>
-              <a:defRPr sz="1100">
-                <a:solidFill>
-                  <a:srgbClr val="F8FAFC"/>
-                </a:solidFill>
-              </a:defRPr>
-            </a:pPr>
-            <a:r>
-              <a:t>• Completely safe: User's personal browser profile, cookies, and history are never accessed.</a:t>
-            </a:r>
-          </a:p>
-          <a:p>
-            <a:pPr>
-              <a:spcAft>
-                <a:spcPts val="600"/>
-              </a:spcAft>
-              <a:defRPr sz="1100">
-                <a:solidFill>
-                  <a:srgbClr val="F8FAFC"/>
-                </a:solidFill>
-              </a:defRPr>
-            </a:pPr>
-            <a:r>
-              <a:t>• Opens 10 concurrent tabs running intensive client-side DOM and Canvas workloads.</a:t>
-            </a:r>
-          </a:p>
-          <a:p>
-            <a:pPr>
-              <a:spcAft>
-                <a:spcPts val="600"/>
-              </a:spcAft>
-              <a:defRPr sz="1100">
-                <a:solidFill>
-                  <a:srgbClr val="F8FAFC"/>
-                </a:solidFill>
-              </a:defRPr>
-            </a:pPr>
-            <a:r>
-              <a:t>• Win32 Job Object automatically terminates only test tabs on completion.</a:t>
+              <a:t>2. Isolated 10-Tab Chrome Launch</a:t>
+            </a:r>
+          </a:p>
+          <a:p>
+            <a:pPr>
+              <a:spcAft>
+                <a:spcPts val="400"/>
+              </a:spcAft>
+              <a:defRPr sz="1000">
+                <a:solidFill>
+                  <a:srgbClr val="F8FAFC"/>
+                </a:solidFill>
+              </a:defRPr>
+            </a:pPr>
+            <a:r>
+              <a:t>• Launches Chrome in isolated sandbox profile (%TEMP%\sched_browser_test_*).</a:t>
+            </a:r>
+          </a:p>
+          <a:p>
+            <a:pPr>
+              <a:spcAft>
+                <a:spcPts val="400"/>
+              </a:spcAft>
+              <a:defRPr sz="1000">
+                <a:solidFill>
+                  <a:srgbClr val="F8FAFC"/>
+                </a:solidFill>
+              </a:defRPr>
+            </a:pPr>
+            <a:r>
+              <a:t>• User personal browser profile and bookmarks remain 100% untouched.</a:t>
+            </a:r>
+          </a:p>
+          <a:p>
+            <a:pPr>
+              <a:spcAft>
+                <a:spcPts val="400"/>
+              </a:spcAft>
+              <a:defRPr sz="1000">
+                <a:solidFill>
+                  <a:srgbClr val="F8FAFC"/>
+                </a:solidFill>
+              </a:defRPr>
+            </a:pPr>
+            <a:r>
+              <a:t>• Win32 Job Object cleanly terminates test tabs upon completion.</a:t>
             </a:r>
           </a:p>
         </p:txBody>
@@ -6158,18 +7109,18 @@
         </p:nvSpPr>
         <p:spPr>
           <a:xfrm>
-            <a:off x="8046720" y="1645920"/>
-            <a:ext cx="3383280" cy="4572000"/>
+            <a:off x="5257800" y="1600200"/>
+            <a:ext cx="6217920" cy="4754879"/>
           </a:xfrm>
           <a:prstGeom prst="roundRect">
             <a:avLst/>
           </a:prstGeom>
           <a:solidFill>
-            <a:srgbClr val="182136"/>
+            <a:srgbClr val="0F172A"/>
           </a:solidFill>
-          <a:ln w="12700">
+          <a:ln w="19050">
             <a:solidFill>
-              <a:srgbClr val="334155"/>
+              <a:srgbClr val="38BDF8"/>
             </a:solidFill>
           </a:ln>
         </p:spPr>
@@ -6195,104 +7146,30 @@
           </a:p>
         </p:txBody>
       </p:sp>
-      <p:sp>
-        <p:nvSpPr>
-          <p:cNvPr id="11" name="TextBox 10"/>
-          <p:cNvSpPr txBox="1"/>
-          <p:nvPr/>
-        </p:nvSpPr>
-        <p:spPr>
-          <a:xfrm>
-            <a:off x="8275320" y="1828800"/>
-            <a:ext cx="2926080" cy="4206240"/>
+      <p:pic>
+        <p:nvPicPr>
+          <p:cNvPr id="11" name="Picture 10" descr="screenshot_dashboard.png"/>
+          <p:cNvPicPr>
+            <a:picLocks noChangeAspect="1"/>
+          </p:cNvPicPr>
+          <p:nvPr/>
+        </p:nvPicPr>
+        <p:blipFill>
+          <a:blip r:embed="rId2"/>
+          <a:stretch>
+            <a:fillRect/>
+          </a:stretch>
+        </p:blipFill>
+        <p:spPr>
+          <a:xfrm>
+            <a:off x="5303520" y="1645920"/>
+            <a:ext cx="6126480" cy="4663440"/>
           </a:xfrm>
           <a:prstGeom prst="rect">
             <a:avLst/>
           </a:prstGeom>
-          <a:noFill/>
-        </p:spPr>
-        <p:txBody>
-          <a:bodyPr wrap="square">
-            <a:spAutoFit/>
-          </a:bodyPr>
-          <a:lstStyle/>
-          <a:p>
-            <a:pPr>
-              <a:spcAft>
-                <a:spcPts val="1000"/>
-              </a:spcAft>
-              <a:defRPr sz="1400" b="1">
-                <a:solidFill>
-                  <a:srgbClr val="10B981"/>
-                </a:solidFill>
-              </a:defRPr>
-            </a:pPr>
-            <a:r>
-              <a:t>3. In-Tab Telemetry Measurement</a:t>
-            </a:r>
-          </a:p>
-          <a:p>
-            <a:pPr>
-              <a:spcAft>
-                <a:spcPts val="600"/>
-              </a:spcAft>
-              <a:defRPr sz="1100">
-                <a:solidFill>
-                  <a:srgbClr val="F8FAFC"/>
-                </a:solidFill>
-              </a:defRPr>
-            </a:pPr>
-            <a:r>
-              <a:t>• DOM Batching: 1,500 styled DOM items generated across 25 frames.</a:t>
-            </a:r>
-          </a:p>
-          <a:p>
-            <a:pPr>
-              <a:spcAft>
-                <a:spcPts val="600"/>
-              </a:spcAft>
-              <a:defRPr sz="1100">
-                <a:solidFill>
-                  <a:srgbClr val="F8FAFC"/>
-                </a:solidFill>
-              </a:defRPr>
-            </a:pPr>
-            <a:r>
-              <a:t>• Active 2D Canvas Rasterization: Multi-frame trigonometric wave rendering.</a:t>
-            </a:r>
-          </a:p>
-          <a:p>
-            <a:pPr>
-              <a:spcAft>
-                <a:spcPts val="600"/>
-              </a:spcAft>
-              <a:defRPr sz="1100">
-                <a:solidFill>
-                  <a:srgbClr val="F8FAFC"/>
-                </a:solidFill>
-              </a:defRPr>
-            </a:pPr>
-            <a:r>
-              <a:t>• Event Loop Queue Delay: Measures actual vs scheduled setTimeout(50ms) timestamps to quantify main-thread UI freezing.</a:t>
-            </a:r>
-          </a:p>
-          <a:p>
-            <a:pPr>
-              <a:spcAft>
-                <a:spcPts val="600"/>
-              </a:spcAft>
-              <a:defRPr sz="1100">
-                <a:solidFill>
-                  <a:srgbClr val="F8FAFC"/>
-                </a:solidFill>
-              </a:defRPr>
-            </a:pPr>
-            <a:r>
-              <a:t>• Automated telemetry feedback: Tabs report load time and event delay via REST JSON.</a:t>
-            </a:r>
-          </a:p>
-        </p:txBody>
-      </p:sp>
+        </p:spPr>
+      </p:pic>
     </p:spTree>
   </p:cSld>
   <p:clrMapOvr>
@@ -6384,7 +7261,7 @@
               </a:defRPr>
             </a:pPr>
             <a:r>
-              <a:t>POLICY COMPARISON</a:t>
+              <a:t>VISUAL EXECUTION EVIDENCE</a:t>
             </a:r>
           </a:p>
         </p:txBody>
@@ -6398,7 +7275,7 @@
         <p:spPr>
           <a:xfrm>
             <a:off x="731520" y="640080"/>
-            <a:ext cx="10698480" cy="548640"/>
+            <a:ext cx="10698480" cy="502920"/>
           </a:xfrm>
           <a:prstGeom prst="rect">
             <a:avLst/>
@@ -6412,14 +7289,14 @@
           <a:lstStyle/>
           <a:p>
             <a:pPr>
-              <a:defRPr sz="2200" b="1">
-                <a:solidFill>
-                  <a:srgbClr val="F8FAFC"/>
-                </a:solidFill>
-              </a:defRPr>
-            </a:pPr>
-            <a:r>
-              <a:t>Scheduling Mechanics: FCFS vs Adaptive Priority</a:t>
+              <a:defRPr sz="2100" b="1">
+                <a:solidFill>
+                  <a:srgbClr val="F8FAFC"/>
+                </a:solidFill>
+              </a:defRPr>
+            </a:pPr>
+            <a:r>
+              <a:t>Side-by-Side In-Tab Behavior: FCFS vs Adaptive</a:t>
             </a:r>
           </a:p>
         </p:txBody>
@@ -6432,7 +7309,7 @@
         </p:nvSpPr>
         <p:spPr>
           <a:xfrm>
-            <a:off x="731520" y="1143000"/>
+            <a:off x="731520" y="1097280"/>
             <a:ext cx="10698480" cy="365760"/>
           </a:xfrm>
           <a:prstGeom prst="rect">
@@ -6447,14 +7324,14 @@
           <a:lstStyle/>
           <a:p>
             <a:pPr>
-              <a:defRPr sz="1200">
+              <a:defRPr sz="1100">
                 <a:solidFill>
                   <a:srgbClr val="94A3B8"/>
                 </a:solidFill>
               </a:defRPr>
             </a:pPr>
             <a:r>
-              <a:t>How the Windows NT dispatcher handles thread quanta under each experimental policy.</a:t>
+              <a:t>Visual comparison of active Chrome rendering tabs under Policy A (FCFS) vs Policy B (Adaptive Priority).</a:t>
             </a:r>
           </a:p>
         </p:txBody>
@@ -6467,8 +7344,77 @@
         </p:nvSpPr>
         <p:spPr>
           <a:xfrm>
+            <a:off x="685800" y="1600200"/>
+            <a:ext cx="5303520" cy="3200400"/>
+          </a:xfrm>
+          <a:prstGeom prst="roundRect">
+            <a:avLst/>
+          </a:prstGeom>
+          <a:solidFill>
+            <a:srgbClr val="0F172A"/>
+          </a:solidFill>
+          <a:ln w="19050">
+            <a:solidFill>
+              <a:srgbClr val="F59E0B"/>
+            </a:solidFill>
+          </a:ln>
+        </p:spPr>
+        <p:style>
+          <a:lnRef idx="1">
+            <a:schemeClr val="accent1"/>
+          </a:lnRef>
+          <a:fillRef idx="3">
+            <a:schemeClr val="accent1"/>
+          </a:fillRef>
+          <a:effectRef idx="2">
+            <a:schemeClr val="accent1"/>
+          </a:effectRef>
+          <a:fontRef idx="minor">
+            <a:schemeClr val="lt1"/>
+          </a:fontRef>
+        </p:style>
+        <p:txBody>
+          <a:bodyPr rtlCol="0" anchor="ctr"/>
+          <a:lstStyle/>
+          <a:p>
+            <a:pPr algn="ctr"/>
+          </a:p>
+        </p:txBody>
+      </p:sp>
+      <p:pic>
+        <p:nvPicPr>
+          <p:cNvPr id="7" name="Picture 6" descr="screenshot_tab_fcfs.png"/>
+          <p:cNvPicPr>
+            <a:picLocks noChangeAspect="1"/>
+          </p:cNvPicPr>
+          <p:nvPr/>
+        </p:nvPicPr>
+        <p:blipFill>
+          <a:blip r:embed="rId2"/>
+          <a:stretch>
+            <a:fillRect/>
+          </a:stretch>
+        </p:blipFill>
+        <p:spPr>
+          <a:xfrm>
             <a:off x="731520" y="1645920"/>
-            <a:ext cx="5212080" cy="4572000"/>
+            <a:ext cx="5212080" cy="3108960"/>
+          </a:xfrm>
+          <a:prstGeom prst="rect">
+            <a:avLst/>
+          </a:prstGeom>
+        </p:spPr>
+      </p:pic>
+      <p:sp>
+        <p:nvSpPr>
+          <p:cNvPr id="8" name="Rounded Rectangle 7"/>
+          <p:cNvSpPr/>
+          <p:nvPr/>
+        </p:nvSpPr>
+        <p:spPr>
+          <a:xfrm>
+            <a:off x="731520" y="4846320"/>
+            <a:ext cx="5212080" cy="1645920"/>
           </a:xfrm>
           <a:prstGeom prst="roundRect">
             <a:avLst/>
@@ -6478,7 +7424,7 @@
           </a:solidFill>
           <a:ln w="12700">
             <a:solidFill>
-              <a:srgbClr val="334155"/>
+              <a:srgbClr val="F59E0B"/>
             </a:solidFill>
           </a:ln>
         </p:spPr>
@@ -6506,14 +7452,14 @@
       </p:sp>
       <p:sp>
         <p:nvSpPr>
-          <p:cNvPr id="7" name="TextBox 6"/>
+          <p:cNvPr id="9" name="TextBox 8"/>
           <p:cNvSpPr txBox="1"/>
           <p:nvPr/>
         </p:nvSpPr>
         <p:spPr>
           <a:xfrm>
-            <a:off x="960120" y="1828800"/>
-            <a:ext cx="4754880" cy="4206240"/>
+            <a:off x="914400" y="4983480"/>
+            <a:ext cx="4846320" cy="1371600"/>
           </a:xfrm>
           <a:prstGeom prst="rect">
             <a:avLst/>
@@ -6528,105 +7474,144 @@
           <a:p>
             <a:pPr>
               <a:spcAft>
-                <a:spcPts val="1000"/>
-              </a:spcAft>
-              <a:defRPr sz="1400" b="1">
+                <a:spcPts val="800"/>
+              </a:spcAft>
+              <a:defRPr sz="1200" b="1">
                 <a:solidFill>
                   <a:srgbClr val="F59E0B"/>
                 </a:solidFill>
               </a:defRPr>
             </a:pPr>
             <a:r>
-              <a:t>Policy A: FCFS Baseline (Equal Share)</a:t>
-            </a:r>
-          </a:p>
-          <a:p>
-            <a:pPr>
-              <a:spcAft>
-                <a:spcPts val="600"/>
-              </a:spcAft>
-              <a:defRPr sz="1100">
-                <a:solidFill>
-                  <a:srgbClr val="F8FAFC"/>
-                </a:solidFill>
-              </a:defRPr>
-            </a:pPr>
-            <a:r>
-              <a:t>• Configuration: Background hashing threads run at THREAD_PRIORITY_NORMAL (Windows base priority 8).</a:t>
-            </a:r>
-          </a:p>
-          <a:p>
-            <a:pPr>
-              <a:spcAft>
-                <a:spcPts val="600"/>
-              </a:spcAft>
-              <a:defRPr sz="1100">
-                <a:solidFill>
-                  <a:srgbClr val="F8FAFC"/>
-                </a:solidFill>
-              </a:defRPr>
-            </a:pPr>
-            <a:r>
-              <a:t>• Kernel Treatment: The Windows NT scheduler treats background compute threads and Chrome renderer threads with identical priority.</a:t>
-            </a:r>
-          </a:p>
-          <a:p>
-            <a:pPr>
-              <a:spcAft>
-                <a:spcPts val="600"/>
-              </a:spcAft>
-              <a:defRPr sz="1100">
-                <a:solidFill>
-                  <a:srgbClr val="F8FAFC"/>
-                </a:solidFill>
-              </a:defRPr>
-            </a:pPr>
-            <a:r>
-              <a:t>• Execution Behavior: Chrome renderer threads must wait in line for background threads to exhaust their time slices (quanta).</a:t>
-            </a:r>
-          </a:p>
-          <a:p>
-            <a:pPr>
-              <a:spcAft>
-                <a:spcPts val="600"/>
-              </a:spcAft>
-              <a:defRPr sz="1100">
-                <a:solidFill>
-                  <a:srgbClr val="F8FAFC"/>
-                </a:solidFill>
-              </a:defRPr>
-            </a:pPr>
-            <a:r>
-              <a:t>• Visual Impact: Red/Orange progress bars creep slowly across the screen with visible stutter.</a:t>
-            </a:r>
-          </a:p>
-          <a:p>
-            <a:pPr>
-              <a:spcAft>
-                <a:spcPts val="600"/>
-              </a:spcAft>
-              <a:defRPr sz="1100">
-                <a:solidFill>
-                  <a:srgbClr val="F8FAFC"/>
-                </a:solidFill>
-              </a:defRPr>
-            </a:pPr>
-            <a:r>
-              <a:t>• Measured Outcome: ~11,564 ms average tab completion time under heavy contention.</a:t>
-            </a:r>
-          </a:p>
-        </p:txBody>
-      </p:sp>
-      <p:sp>
-        <p:nvSpPr>
-          <p:cNvPr id="8" name="Rounded Rectangle 7"/>
+              <a:t>Policy A: FCFS Baseline (Head-of-Line Blocking)</a:t>
+            </a:r>
+          </a:p>
+          <a:p>
+            <a:pPr>
+              <a:spcAft>
+                <a:spcPts val="400"/>
+              </a:spcAft>
+              <a:defRPr sz="1000">
+                <a:solidFill>
+                  <a:srgbClr val="F8FAFC"/>
+                </a:solidFill>
+              </a:defRPr>
+            </a:pPr>
+            <a:r>
+              <a:t>• Notice the bright Amber Banner: QUEUE CONVOY EFFECT.</a:t>
+            </a:r>
+          </a:p>
+          <a:p>
+            <a:pPr>
+              <a:spcAft>
+                <a:spcPts val="400"/>
+              </a:spcAft>
+              <a:defRPr sz="1000">
+                <a:solidFill>
+                  <a:srgbClr val="F8FAFC"/>
+                </a:solidFill>
+              </a:defRPr>
+            </a:pPr>
+            <a:r>
+              <a:t>• Progress bar creeps slowly across the screen (crawling for ~11 seconds).</a:t>
+            </a:r>
+          </a:p>
+          <a:p>
+            <a:pPr>
+              <a:spcAft>
+                <a:spcPts val="400"/>
+              </a:spcAft>
+              <a:defRPr sz="1000">
+                <a:solidFill>
+                  <a:srgbClr val="F8FAFC"/>
+                </a:solidFill>
+              </a:defRPr>
+            </a:pPr>
+            <a:r>
+              <a:t>• Status badge confirms: Queue Stalled: Waiting for Background Slices.</a:t>
+            </a:r>
+          </a:p>
+        </p:txBody>
+      </p:sp>
+      <p:sp>
+        <p:nvSpPr>
+          <p:cNvPr id="10" name="Rounded Rectangle 9"/>
           <p:cNvSpPr/>
           <p:nvPr/>
         </p:nvSpPr>
         <p:spPr>
           <a:xfrm>
+            <a:off x="6172200" y="1600200"/>
+            <a:ext cx="5303520" cy="3200400"/>
+          </a:xfrm>
+          <a:prstGeom prst="roundRect">
+            <a:avLst/>
+          </a:prstGeom>
+          <a:solidFill>
+            <a:srgbClr val="0F172A"/>
+          </a:solidFill>
+          <a:ln w="19050">
+            <a:solidFill>
+              <a:srgbClr val="10B981"/>
+            </a:solidFill>
+          </a:ln>
+        </p:spPr>
+        <p:style>
+          <a:lnRef idx="1">
+            <a:schemeClr val="accent1"/>
+          </a:lnRef>
+          <a:fillRef idx="3">
+            <a:schemeClr val="accent1"/>
+          </a:fillRef>
+          <a:effectRef idx="2">
+            <a:schemeClr val="accent1"/>
+          </a:effectRef>
+          <a:fontRef idx="minor">
+            <a:schemeClr val="lt1"/>
+          </a:fontRef>
+        </p:style>
+        <p:txBody>
+          <a:bodyPr rtlCol="0" anchor="ctr"/>
+          <a:lstStyle/>
+          <a:p>
+            <a:pPr algn="ctr"/>
+          </a:p>
+        </p:txBody>
+      </p:sp>
+      <p:pic>
+        <p:nvPicPr>
+          <p:cNvPr id="11" name="Picture 10" descr="screenshot_tab_adaptive.png"/>
+          <p:cNvPicPr>
+            <a:picLocks noChangeAspect="1"/>
+          </p:cNvPicPr>
+          <p:nvPr/>
+        </p:nvPicPr>
+        <p:blipFill>
+          <a:blip r:embed="rId3"/>
+          <a:stretch>
+            <a:fillRect/>
+          </a:stretch>
+        </p:blipFill>
+        <p:spPr>
+          <a:xfrm>
             <a:off x="6217920" y="1645920"/>
-            <a:ext cx="5212080" cy="4572000"/>
+            <a:ext cx="5212080" cy="3108960"/>
+          </a:xfrm>
+          <a:prstGeom prst="rect">
+            <a:avLst/>
+          </a:prstGeom>
+        </p:spPr>
+      </p:pic>
+      <p:sp>
+        <p:nvSpPr>
+          <p:cNvPr id="12" name="Rounded Rectangle 11"/>
+          <p:cNvSpPr/>
+          <p:nvPr/>
+        </p:nvSpPr>
+        <p:spPr>
+          <a:xfrm>
+            <a:off x="6217920" y="4846320"/>
+            <a:ext cx="5212080" cy="1645920"/>
           </a:xfrm>
           <a:prstGeom prst="roundRect">
             <a:avLst/>
@@ -6636,7 +7621,7 @@
           </a:solidFill>
           <a:ln w="12700">
             <a:solidFill>
-              <a:srgbClr val="334155"/>
+              <a:srgbClr val="10B981"/>
             </a:solidFill>
           </a:ln>
         </p:spPr>
@@ -6664,14 +7649,14 @@
       </p:sp>
       <p:sp>
         <p:nvSpPr>
-          <p:cNvPr id="9" name="TextBox 8"/>
+          <p:cNvPr id="13" name="TextBox 12"/>
           <p:cNvSpPr txBox="1"/>
           <p:nvPr/>
         </p:nvSpPr>
         <p:spPr>
           <a:xfrm>
-            <a:off x="6446520" y="1828800"/>
-            <a:ext cx="4754880" cy="4206240"/>
+            <a:off x="6400800" y="4983480"/>
+            <a:ext cx="4846320" cy="1371600"/>
           </a:xfrm>
           <a:prstGeom prst="rect">
             <a:avLst/>
@@ -6686,91 +7671,61 @@
           <a:p>
             <a:pPr>
               <a:spcAft>
-                <a:spcPts val="1000"/>
-              </a:spcAft>
-              <a:defRPr sz="1400" b="1">
+                <a:spcPts val="800"/>
+              </a:spcAft>
+              <a:defRPr sz="1200" b="1">
                 <a:solidFill>
                   <a:srgbClr val="10B981"/>
                 </a:solidFill>
               </a:defRPr>
             </a:pPr>
             <a:r>
-              <a:t>Policy B: Adaptive Priority + Aging Watchdog</a:t>
-            </a:r>
-          </a:p>
-          <a:p>
-            <a:pPr>
-              <a:spcAft>
-                <a:spcPts val="600"/>
-              </a:spcAft>
-              <a:defRPr sz="1100">
-                <a:solidFill>
-                  <a:srgbClr val="F8FAFC"/>
-                </a:solidFill>
-              </a:defRPr>
-            </a:pPr>
-            <a:r>
-              <a:t>• Initial Demotion: Background workers are immediately demoted to THREAD_PRIORITY_LOWEST (Windows base priority 4).</a:t>
-            </a:r>
-          </a:p>
-          <a:p>
-            <a:pPr>
-              <a:spcAft>
-                <a:spcPts val="600"/>
-              </a:spcAft>
-              <a:defRPr sz="1100">
-                <a:solidFill>
-                  <a:srgbClr val="F8FAFC"/>
-                </a:solidFill>
-              </a:defRPr>
-            </a:pPr>
-            <a:r>
-              <a:t>• Preemptive Execution: Windows scheduler prioritizes Chrome threads (levels 8-10), granting them instant CPU quanta without queue waiting.</a:t>
-            </a:r>
-          </a:p>
-          <a:p>
-            <a:pPr>
-              <a:spcAft>
-                <a:spcPts val="600"/>
-              </a:spcAft>
-              <a:defRPr sz="1100">
-                <a:solidFill>
-                  <a:srgbClr val="F8FAFC"/>
-                </a:solidFill>
-              </a:defRPr>
-            </a:pPr>
-            <a:r>
-              <a:t>• Aging Watchdog: Dedicated scheduler thread tracks background starvation; triggers a 160ms boost to NORMAL priority every 1,200ms.</a:t>
-            </a:r>
-          </a:p>
-          <a:p>
-            <a:pPr>
-              <a:spcAft>
-                <a:spcPts val="600"/>
-              </a:spcAft>
-              <a:defRPr sz="1100">
-                <a:solidFill>
-                  <a:srgbClr val="F8FAFC"/>
-                </a:solidFill>
-              </a:defRPr>
-            </a:pPr>
-            <a:r>
-              <a:t>• Visual Impact: Vibrant cyan progress bars rush forward smoothly; priority badges actively modulate.</a:t>
-            </a:r>
-          </a:p>
-          <a:p>
-            <a:pPr>
-              <a:spcAft>
-                <a:spcPts val="600"/>
-              </a:spcAft>
-              <a:defRPr sz="1100">
-                <a:solidFill>
-                  <a:srgbClr val="F8FAFC"/>
-                </a:solidFill>
-              </a:defRPr>
-            </a:pPr>
-            <a:r>
-              <a:t>• Measured Outcome: ~5,448 ms average tab completion time (52.9% Faster!).</a:t>
+              <a:t>Policy B: Adaptive Priority (Preemptive Execution)</a:t>
+            </a:r>
+          </a:p>
+          <a:p>
+            <a:pPr>
+              <a:spcAft>
+                <a:spcPts val="400"/>
+              </a:spcAft>
+              <a:defRPr sz="1000">
+                <a:solidFill>
+                  <a:srgbClr val="F8FAFC"/>
+                </a:solidFill>
+              </a:defRPr>
+            </a:pPr>
+            <a:r>
+              <a:t>• Notice the bright Cyan Banner: ADAPTIVE PREEMPTION: Immediate CPU Access.</a:t>
+            </a:r>
+          </a:p>
+          <a:p>
+            <a:pPr>
+              <a:spcAft>
+                <a:spcPts val="400"/>
+              </a:spcAft>
+              <a:defRPr sz="1000">
+                <a:solidFill>
+                  <a:srgbClr val="F8FAFC"/>
+                </a:solidFill>
+              </a:defRPr>
+            </a:pPr>
+            <a:r>
+              <a:t>• Progress bar rushes smoothly across the screen (finishing in ~5 seconds).</a:t>
+            </a:r>
+          </a:p>
+          <a:p>
+            <a:pPr>
+              <a:spcAft>
+                <a:spcPts val="400"/>
+              </a:spcAft>
+              <a:defRPr sz="1000">
+                <a:solidFill>
+                  <a:srgbClr val="F8FAFC"/>
+                </a:solidFill>
+              </a:defRPr>
+            </a:pPr>
+            <a:r>
+              <a:t>• Status badge confirms: Direct Preemption: Active CPU Quanta.</a:t>
             </a:r>
           </a:p>
         </p:txBody>
@@ -6880,7 +7835,7 @@
         <p:spPr>
           <a:xfrm>
             <a:off x="731520" y="640080"/>
-            <a:ext cx="10698480" cy="548640"/>
+            <a:ext cx="10698480" cy="502920"/>
           </a:xfrm>
           <a:prstGeom prst="rect">
             <a:avLst/>
@@ -6894,14 +7849,14 @@
           <a:lstStyle/>
           <a:p>
             <a:pPr>
-              <a:defRPr sz="2200" b="1">
-                <a:solidFill>
-                  <a:srgbClr val="F8FAFC"/>
-                </a:solidFill>
-              </a:defRPr>
-            </a:pPr>
-            <a:r>
-              <a:t>Quantitative Findings: Real Browser Benchmark</a:t>
+              <a:defRPr sz="2100" b="1">
+                <a:solidFill>
+                  <a:srgbClr val="F8FAFC"/>
+                </a:solidFill>
+              </a:defRPr>
+            </a:pPr>
+            <a:r>
+              <a:t>Quantitative Findings: 52.9% Faster Page Responsiveness</a:t>
             </a:r>
           </a:p>
         </p:txBody>
@@ -6914,7 +7869,7 @@
         </p:nvSpPr>
         <p:spPr>
           <a:xfrm>
-            <a:off x="731520" y="1143000"/>
+            <a:off x="731520" y="1097280"/>
             <a:ext cx="10698480" cy="365760"/>
           </a:xfrm>
           <a:prstGeom prst="rect">
@@ -6929,432 +7884,97 @@
           <a:lstStyle/>
           <a:p>
             <a:pPr>
-              <a:defRPr sz="1200">
+              <a:defRPr sz="1100">
                 <a:solidFill>
                   <a:srgbClr val="94A3B8"/>
                 </a:solidFill>
               </a:defRPr>
             </a:pPr>
             <a:r>
-              <a:t>Measured metrics collected across 10 concurrent tabs on an Intel Core i7-13700HX (24 Logical Processors).</a:t>
-            </a:r>
-          </a:p>
-        </p:txBody>
-      </p:sp>
-      <p:graphicFrame>
-        <p:nvGraphicFramePr>
-          <p:cNvPr id="6" name="Table 5"/>
-          <p:cNvGraphicFramePr>
-            <a:graphicFrameLocks noGrp="1"/>
-          </p:cNvGraphicFramePr>
-          <p:nvPr/>
-        </p:nvGraphicFramePr>
-        <p:xfrm>
-          <a:off x="731520" y="1645920"/>
-          <a:ext cx="10698480" cy="2011680"/>
-        </p:xfrm>
-        <a:graphic>
-          <a:graphicData uri="http://schemas.openxmlformats.org/drawingml/2006/table">
-            <a:tbl>
-              <a:tblPr firstRow="1" bandRow="1">
-                <a:tableStyleId>{5C22544A-7EE6-4342-B048-85BDC9FD1C3A}</a:tableStyleId>
-              </a:tblPr>
-              <a:tblGrid>
-                <a:gridCol w="2674620"/>
-                <a:gridCol w="2674620"/>
-                <a:gridCol w="2674620"/>
-                <a:gridCol w="2674620"/>
-              </a:tblGrid>
-              <a:tr h="502920">
-                <a:tc>
-                  <a:txBody>
-                    <a:bodyPr/>
-                    <a:lstStyle/>
-                    <a:p>
-                      <a:pPr>
-                        <a:defRPr b="1" sz="1100">
-                          <a:solidFill>
-                            <a:srgbClr val="38BDF8"/>
-                          </a:solidFill>
-                        </a:defRPr>
-                      </a:pPr>
-                      <a:r>
-                        <a:t>Performance Metric</a:t>
-                      </a:r>
-                    </a:p>
-                  </a:txBody>
-                  <a:tcPr>
-                    <a:solidFill>
-                      <a:srgbClr val="1E293B"/>
-                    </a:solidFill>
-                  </a:tcPr>
-                </a:tc>
-                <a:tc>
-                  <a:txBody>
-                    <a:bodyPr/>
-                    <a:lstStyle/>
-                    <a:p>
-                      <a:pPr>
-                        <a:defRPr b="1" sz="1100">
-                          <a:solidFill>
-                            <a:srgbClr val="38BDF8"/>
-                          </a:solidFill>
-                        </a:defRPr>
-                      </a:pPr>
-                      <a:r>
-                        <a:t>Policy A: FCFS Baseline</a:t>
-                      </a:r>
-                    </a:p>
-                  </a:txBody>
-                  <a:tcPr>
-                    <a:solidFill>
-                      <a:srgbClr val="1E293B"/>
-                    </a:solidFill>
-                  </a:tcPr>
-                </a:tc>
-                <a:tc>
-                  <a:txBody>
-                    <a:bodyPr/>
-                    <a:lstStyle/>
-                    <a:p>
-                      <a:pPr>
-                        <a:defRPr b="1" sz="1100">
-                          <a:solidFill>
-                            <a:srgbClr val="38BDF8"/>
-                          </a:solidFill>
-                        </a:defRPr>
-                      </a:pPr>
-                      <a:r>
-                        <a:t>Policy B: Adaptive Priority</a:t>
-                      </a:r>
-                    </a:p>
-                  </a:txBody>
-                  <a:tcPr>
-                    <a:solidFill>
-                      <a:srgbClr val="1E293B"/>
-                    </a:solidFill>
-                  </a:tcPr>
-                </a:tc>
-                <a:tc>
-                  <a:txBody>
-                    <a:bodyPr/>
-                    <a:lstStyle/>
-                    <a:p>
-                      <a:pPr>
-                        <a:defRPr b="1" sz="1100">
-                          <a:solidFill>
-                            <a:srgbClr val="38BDF8"/>
-                          </a:solidFill>
-                        </a:defRPr>
-                      </a:pPr>
-                      <a:r>
-                        <a:t>Empirical Improvement</a:t>
-                      </a:r>
-                    </a:p>
-                  </a:txBody>
-                  <a:tcPr>
-                    <a:solidFill>
-                      <a:srgbClr val="1E293B"/>
-                    </a:solidFill>
-                  </a:tcPr>
-                </a:tc>
-              </a:tr>
-              <a:tr h="502920">
-                <a:tc>
-                  <a:txBody>
-                    <a:bodyPr/>
-                    <a:lstStyle/>
-                    <a:p>
-                      <a:pPr>
-                        <a:defRPr sz="1100">
-                          <a:solidFill>
-                            <a:srgbClr val="F8FAFC"/>
-                          </a:solidFill>
-                        </a:defRPr>
-                      </a:pPr>
-                      <a:r>
-                        <a:t>Average Tab Load Latency</a:t>
-                      </a:r>
-                    </a:p>
-                  </a:txBody>
-                  <a:tcPr>
-                    <a:solidFill>
-                      <a:srgbClr val="182136"/>
-                    </a:solidFill>
-                  </a:tcPr>
-                </a:tc>
-                <a:tc>
-                  <a:txBody>
-                    <a:bodyPr/>
-                    <a:lstStyle/>
-                    <a:p>
-                      <a:pPr>
-                        <a:defRPr sz="1100">
-                          <a:solidFill>
-                            <a:srgbClr val="F8FAFC"/>
-                          </a:solidFill>
-                        </a:defRPr>
-                      </a:pPr>
-                      <a:r>
-                        <a:t>11,564.3 ms</a:t>
-                      </a:r>
-                    </a:p>
-                  </a:txBody>
-                  <a:tcPr>
-                    <a:solidFill>
-                      <a:srgbClr val="182136"/>
-                    </a:solidFill>
-                  </a:tcPr>
-                </a:tc>
-                <a:tc>
-                  <a:txBody>
-                    <a:bodyPr/>
-                    <a:lstStyle/>
-                    <a:p>
-                      <a:pPr>
-                        <a:defRPr sz="1100">
-                          <a:solidFill>
-                            <a:srgbClr val="F8FAFC"/>
-                          </a:solidFill>
-                        </a:defRPr>
-                      </a:pPr>
-                      <a:r>
-                        <a:t>5,448.3 ms</a:t>
-                      </a:r>
-                    </a:p>
-                  </a:txBody>
-                  <a:tcPr>
-                    <a:solidFill>
-                      <a:srgbClr val="182136"/>
-                    </a:solidFill>
-                  </a:tcPr>
-                </a:tc>
-                <a:tc>
-                  <a:txBody>
-                    <a:bodyPr/>
-                    <a:lstStyle/>
-                    <a:p>
-                      <a:pPr>
-                        <a:defRPr sz="1100" b="1">
-                          <a:solidFill>
-                            <a:srgbClr val="10B981"/>
-                          </a:solidFill>
-                        </a:defRPr>
-                      </a:pPr>
-                      <a:r>
-                        <a:t>52.9% Faster Page Load (✔)</a:t>
-                      </a:r>
-                    </a:p>
-                  </a:txBody>
-                  <a:tcPr>
-                    <a:solidFill>
-                      <a:srgbClr val="182136"/>
-                    </a:solidFill>
-                  </a:tcPr>
-                </a:tc>
-              </a:tr>
-              <a:tr h="502920">
-                <a:tc>
-                  <a:txBody>
-                    <a:bodyPr/>
-                    <a:lstStyle/>
-                    <a:p>
-                      <a:pPr>
-                        <a:defRPr sz="1100">
-                          <a:solidFill>
-                            <a:srgbClr val="F8FAFC"/>
-                          </a:solidFill>
-                        </a:defRPr>
-                      </a:pPr>
-                      <a:r>
-                        <a:t>Main-Thread Event Loop Lag</a:t>
-                      </a:r>
-                    </a:p>
-                  </a:txBody>
-                  <a:tcPr>
-                    <a:solidFill>
-                      <a:srgbClr val="182136"/>
-                    </a:solidFill>
-                  </a:tcPr>
-                </a:tc>
-                <a:tc>
-                  <a:txBody>
-                    <a:bodyPr/>
-                    <a:lstStyle/>
-                    <a:p>
-                      <a:pPr>
-                        <a:defRPr sz="1100">
-                          <a:solidFill>
-                            <a:srgbClr val="F8FAFC"/>
-                          </a:solidFill>
-                        </a:defRPr>
-                      </a:pPr>
-                      <a:r>
-                        <a:t>98.2 ms delay</a:t>
-                      </a:r>
-                    </a:p>
-                  </a:txBody>
-                  <a:tcPr>
-                    <a:solidFill>
-                      <a:srgbClr val="182136"/>
-                    </a:solidFill>
-                  </a:tcPr>
-                </a:tc>
-                <a:tc>
-                  <a:txBody>
-                    <a:bodyPr/>
-                    <a:lstStyle/>
-                    <a:p>
-                      <a:pPr>
-                        <a:defRPr sz="1100">
-                          <a:solidFill>
-                            <a:srgbClr val="F8FAFC"/>
-                          </a:solidFill>
-                        </a:defRPr>
-                      </a:pPr>
-                      <a:r>
-                        <a:t>85.9 ms delay</a:t>
-                      </a:r>
-                    </a:p>
-                  </a:txBody>
-                  <a:tcPr>
-                    <a:solidFill>
-                      <a:srgbClr val="182136"/>
-                    </a:solidFill>
-                  </a:tcPr>
-                </a:tc>
-                <a:tc>
-                  <a:txBody>
-                    <a:bodyPr/>
-                    <a:lstStyle/>
-                    <a:p>
-                      <a:pPr>
-                        <a:defRPr sz="1100" b="1">
-                          <a:solidFill>
-                            <a:srgbClr val="10B981"/>
-                          </a:solidFill>
-                        </a:defRPr>
-                      </a:pPr>
-                      <a:r>
-                        <a:t>12.6% Lower Event Delay (✔)</a:t>
-                      </a:r>
-                    </a:p>
-                  </a:txBody>
-                  <a:tcPr>
-                    <a:solidFill>
-                      <a:srgbClr val="182136"/>
-                    </a:solidFill>
-                  </a:tcPr>
-                </a:tc>
-              </a:tr>
-              <a:tr h="502920">
-                <a:tc>
-                  <a:txBody>
-                    <a:bodyPr/>
-                    <a:lstStyle/>
-                    <a:p>
-                      <a:pPr>
-                        <a:defRPr sz="1100">
-                          <a:solidFill>
-                            <a:srgbClr val="F8FAFC"/>
-                          </a:solidFill>
-                        </a:defRPr>
-                      </a:pPr>
-                      <a:r>
-                        <a:t>Background Execution Makespan</a:t>
-                      </a:r>
-                    </a:p>
-                  </a:txBody>
-                  <a:tcPr>
-                    <a:solidFill>
-                      <a:srgbClr val="182136"/>
-                    </a:solidFill>
-                  </a:tcPr>
-                </a:tc>
-                <a:tc>
-                  <a:txBody>
-                    <a:bodyPr/>
-                    <a:lstStyle/>
-                    <a:p>
-                      <a:pPr>
-                        <a:defRPr sz="1100">
-                          <a:solidFill>
-                            <a:srgbClr val="F8FAFC"/>
-                          </a:solidFill>
-                        </a:defRPr>
-                      </a:pPr>
-                      <a:r>
-                        <a:t>10,258.8 ms</a:t>
-                      </a:r>
-                    </a:p>
-                  </a:txBody>
-                  <a:tcPr>
-                    <a:solidFill>
-                      <a:srgbClr val="182136"/>
-                    </a:solidFill>
-                  </a:tcPr>
-                </a:tc>
-                <a:tc>
-                  <a:txBody>
-                    <a:bodyPr/>
-                    <a:lstStyle/>
-                    <a:p>
-                      <a:pPr>
-                        <a:defRPr sz="1100">
-                          <a:solidFill>
-                            <a:srgbClr val="F8FAFC"/>
-                          </a:solidFill>
-                        </a:defRPr>
-                      </a:pPr>
-                      <a:r>
-                        <a:t>5,833.7 ms</a:t>
-                      </a:r>
-                    </a:p>
-                  </a:txBody>
-                  <a:tcPr>
-                    <a:solidFill>
-                      <a:srgbClr val="182136"/>
-                    </a:solidFill>
-                  </a:tcPr>
-                </a:tc>
-                <a:tc>
-                  <a:txBody>
-                    <a:bodyPr/>
-                    <a:lstStyle/>
-                    <a:p>
-                      <a:pPr>
-                        <a:defRPr sz="1100" b="1">
-                          <a:solidFill>
-                            <a:srgbClr val="10B981"/>
-                          </a:solidFill>
-                        </a:defRPr>
-                      </a:pPr>
-                      <a:r>
-                        <a:t>Overhead Absorbed via Idle Quanta</a:t>
-                      </a:r>
-                    </a:p>
-                  </a:txBody>
-                  <a:tcPr>
-                    <a:solidFill>
-                      <a:srgbClr val="182136"/>
-                    </a:solidFill>
-                  </a:tcPr>
-                </a:tc>
-              </a:tr>
-            </a:tbl>
-          </a:graphicData>
-        </a:graphic>
-      </p:graphicFrame>
-      <p:sp>
-        <p:nvSpPr>
-          <p:cNvPr id="7" name="Rounded Rectangle 6"/>
+              <a:t>Real millisecond measurements collected across 10 concurrent tabs on an Intel Core i7-13700HX (24 Cores).</a:t>
+            </a:r>
+          </a:p>
+        </p:txBody>
+      </p:sp>
+      <p:sp>
+        <p:nvSpPr>
+          <p:cNvPr id="6" name="Rounded Rectangle 5"/>
           <p:cNvSpPr/>
           <p:nvPr/>
         </p:nvSpPr>
         <p:spPr>
           <a:xfrm>
-            <a:off x="731520" y="3931920"/>
-            <a:ext cx="5212080" cy="2377440"/>
+            <a:off x="685800" y="1508760"/>
+            <a:ext cx="10789919" cy="3108960"/>
+          </a:xfrm>
+          <a:prstGeom prst="roundRect">
+            <a:avLst/>
+          </a:prstGeom>
+          <a:solidFill>
+            <a:srgbClr val="0F172A"/>
+          </a:solidFill>
+          <a:ln w="19050">
+            <a:solidFill>
+              <a:srgbClr val="10B981"/>
+            </a:solidFill>
+          </a:ln>
+        </p:spPr>
+        <p:style>
+          <a:lnRef idx="1">
+            <a:schemeClr val="accent1"/>
+          </a:lnRef>
+          <a:fillRef idx="3">
+            <a:schemeClr val="accent1"/>
+          </a:fillRef>
+          <a:effectRef idx="2">
+            <a:schemeClr val="accent1"/>
+          </a:effectRef>
+          <a:fontRef idx="minor">
+            <a:schemeClr val="lt1"/>
+          </a:fontRef>
+        </p:style>
+        <p:txBody>
+          <a:bodyPr rtlCol="0" anchor="ctr"/>
+          <a:lstStyle/>
+          <a:p>
+            <a:pPr algn="ctr"/>
+          </a:p>
+        </p:txBody>
+      </p:sp>
+      <p:pic>
+        <p:nvPicPr>
+          <p:cNvPr id="7" name="Picture 6" descr="screenshot_bars_and_conclusion.png"/>
+          <p:cNvPicPr>
+            <a:picLocks noChangeAspect="1"/>
+          </p:cNvPicPr>
+          <p:nvPr/>
+        </p:nvPicPr>
+        <p:blipFill>
+          <a:blip r:embed="rId2"/>
+          <a:stretch>
+            <a:fillRect/>
+          </a:stretch>
+        </p:blipFill>
+        <p:spPr>
+          <a:xfrm>
+            <a:off x="731520" y="1554480"/>
+            <a:ext cx="10698480" cy="3017520"/>
+          </a:xfrm>
+          <a:prstGeom prst="rect">
+            <a:avLst/>
+          </a:prstGeom>
+        </p:spPr>
+      </p:pic>
+      <p:sp>
+        <p:nvSpPr>
+          <p:cNvPr id="8" name="Rounded Rectangle 7"/>
+          <p:cNvSpPr/>
+          <p:nvPr/>
+        </p:nvSpPr>
+        <p:spPr>
+          <a:xfrm>
+            <a:off x="731520" y="4709160"/>
+            <a:ext cx="3383280" cy="1737360"/>
           </a:xfrm>
           <a:prstGeom prst="roundRect">
             <a:avLst/>
@@ -7392,14 +8012,14 @@
       </p:sp>
       <p:sp>
         <p:nvSpPr>
-          <p:cNvPr id="8" name="TextBox 7"/>
+          <p:cNvPr id="9" name="TextBox 8"/>
           <p:cNvSpPr txBox="1"/>
           <p:nvPr/>
         </p:nvSpPr>
         <p:spPr>
           <a:xfrm>
-            <a:off x="960120" y="4114800"/>
-            <a:ext cx="4754880" cy="2011680"/>
+            <a:off x="914400" y="4846320"/>
+            <a:ext cx="3017520" cy="1463039"/>
           </a:xfrm>
           <a:prstGeom prst="rect">
             <a:avLst/>
@@ -7414,90 +8034,75 @@
           <a:p>
             <a:pPr>
               <a:spcAft>
-                <a:spcPts val="1000"/>
-              </a:spcAft>
-              <a:defRPr sz="1400" b="1">
+                <a:spcPts val="800"/>
+              </a:spcAft>
+              <a:defRPr sz="1200" b="1">
                 <a:solidFill>
                   <a:srgbClr val="38BDF8"/>
                 </a:solidFill>
               </a:defRPr>
             </a:pPr>
             <a:r>
-              <a:t>Visual Bar Chart Representation</a:t>
-            </a:r>
-          </a:p>
-          <a:p>
-            <a:pPr>
-              <a:spcAft>
-                <a:spcPts val="600"/>
-              </a:spcAft>
-              <a:defRPr sz="1100">
-                <a:solidFill>
-                  <a:srgbClr val="F8FAFC"/>
-                </a:solidFill>
-              </a:defRPr>
-            </a:pPr>
-            <a:r>
-              <a:t>• Dashboard features a Gantt-style horizontal timeline comparison bar.</a:t>
-            </a:r>
-          </a:p>
-          <a:p>
-            <a:pPr>
-              <a:spcAft>
-                <a:spcPts val="600"/>
-              </a:spcAft>
-              <a:defRPr sz="1100">
-                <a:solidFill>
-                  <a:srgbClr val="F8FAFC"/>
-                </a:solidFill>
-              </a:defRPr>
-            </a:pPr>
-            <a:r>
-              <a:t>• FCFS bar stretches across 100% of width (11,564ms) showing queue stalling.</a:t>
-            </a:r>
-          </a:p>
-          <a:p>
-            <a:pPr>
-              <a:spcAft>
-                <a:spcPts val="600"/>
-              </a:spcAft>
-              <a:defRPr sz="1100">
-                <a:solidFill>
-                  <a:srgbClr val="F8FAFC"/>
-                </a:solidFill>
-              </a:defRPr>
-            </a:pPr>
-            <a:r>
-              <a:t>• Adaptive bar is cut in half (5,448ms) showing instant preemptive execution.</a:t>
-            </a:r>
-          </a:p>
-          <a:p>
-            <a:pPr>
-              <a:spcAft>
-                <a:spcPts val="600"/>
-              </a:spcAft>
-              <a:defRPr sz="1100">
-                <a:solidFill>
-                  <a:srgbClr val="F8FAFC"/>
-                </a:solidFill>
-              </a:defRPr>
-            </a:pPr>
-            <a:r>
-              <a:t>• Gives professors and evaluators instant visual verification of results.</a:t>
-            </a:r>
-          </a:p>
-        </p:txBody>
-      </p:sp>
-      <p:sp>
-        <p:nvSpPr>
-          <p:cNvPr id="9" name="Rounded Rectangle 8"/>
+              <a:t>1. Page Load Latency</a:t>
+            </a:r>
+          </a:p>
+          <a:p>
+            <a:pPr>
+              <a:spcAft>
+                <a:spcPts val="400"/>
+              </a:spcAft>
+              <a:defRPr sz="1000">
+                <a:solidFill>
+                  <a:srgbClr val="F8FAFC"/>
+                </a:solidFill>
+              </a:defRPr>
+            </a:pPr>
+            <a:r>
+              <a:t>• FCFS Baseline: 11,564.3 ms</a:t>
+            </a:r>
+          </a:p>
+          <a:p>
+            <a:pPr>
+              <a:spcAft>
+                <a:spcPts val="400"/>
+              </a:spcAft>
+              <a:defRPr sz="1000">
+                <a:solidFill>
+                  <a:srgbClr val="F8FAFC"/>
+                </a:solidFill>
+              </a:defRPr>
+            </a:pPr>
+            <a:r>
+              <a:t>• Adaptive Priority: 5,448.3 ms</a:t>
+            </a:r>
+          </a:p>
+          <a:p>
+            <a:pPr>
+              <a:spcAft>
+                <a:spcPts val="400"/>
+              </a:spcAft>
+              <a:defRPr sz="1000">
+                <a:solidFill>
+                  <a:srgbClr val="F8FAFC"/>
+                </a:solidFill>
+              </a:defRPr>
+            </a:pPr>
+            <a:r>
+              <a:t>• Outcome: 52.9% Faster Page Load (✔)</a:t>
+            </a:r>
+          </a:p>
+        </p:txBody>
+      </p:sp>
+      <p:sp>
+        <p:nvSpPr>
+          <p:cNvPr id="10" name="Rounded Rectangle 9"/>
           <p:cNvSpPr/>
           <p:nvPr/>
         </p:nvSpPr>
         <p:spPr>
           <a:xfrm>
-            <a:off x="6217920" y="3931920"/>
-            <a:ext cx="5212080" cy="2377440"/>
+            <a:off x="4389120" y="4709160"/>
+            <a:ext cx="3383280" cy="1737360"/>
           </a:xfrm>
           <a:prstGeom prst="roundRect">
             <a:avLst/>
@@ -7535,14 +8140,14 @@
       </p:sp>
       <p:sp>
         <p:nvSpPr>
-          <p:cNvPr id="10" name="TextBox 9"/>
+          <p:cNvPr id="11" name="TextBox 10"/>
           <p:cNvSpPr txBox="1"/>
           <p:nvPr/>
         </p:nvSpPr>
         <p:spPr>
           <a:xfrm>
-            <a:off x="6446520" y="4114800"/>
-            <a:ext cx="4754880" cy="2011680"/>
+            <a:off x="4572000" y="4846320"/>
+            <a:ext cx="3017520" cy="1463039"/>
           </a:xfrm>
           <a:prstGeom prst="rect">
             <a:avLst/>
@@ -7557,61 +8162,189 @@
           <a:p>
             <a:pPr>
               <a:spcAft>
-                <a:spcPts val="1000"/>
-              </a:spcAft>
-              <a:defRPr sz="1400" b="1">
+                <a:spcPts val="800"/>
+              </a:spcAft>
+              <a:defRPr sz="1200" b="1">
                 <a:solidFill>
                   <a:srgbClr val="10B981"/>
                 </a:solidFill>
               </a:defRPr>
             </a:pPr>
             <a:r>
-              <a:t>Academic Integrity &amp; Dynamic Evaluation</a:t>
-            </a:r>
-          </a:p>
-          <a:p>
-            <a:pPr>
-              <a:spcAft>
-                <a:spcPts val="600"/>
-              </a:spcAft>
-              <a:defRPr sz="1100">
-                <a:solidFill>
-                  <a:srgbClr val="F8FAFC"/>
-                </a:solidFill>
-              </a:defRPr>
-            </a:pPr>
-            <a:r>
-              <a:t>• Results are computed dynamically from actual millisecond deltas.</a:t>
-            </a:r>
-          </a:p>
-          <a:p>
-            <a:pPr>
-              <a:spcAft>
-                <a:spcPts val="600"/>
-              </a:spcAft>
-              <a:defRPr sz="1100">
-                <a:solidFill>
-                  <a:srgbClr val="F8FAFC"/>
-                </a:solidFill>
-              </a:defRPr>
-            </a:pPr>
-            <a:r>
-              <a:t>• The system never hardcodes winners: if FCFS performs better under low contention, the UI truthfully declares FCFS the winner with amber badges.</a:t>
-            </a:r>
-          </a:p>
-          <a:p>
-            <a:pPr>
-              <a:spcAft>
-                <a:spcPts val="600"/>
-              </a:spcAft>
-              <a:defRPr sz="1100">
-                <a:solidFill>
-                  <a:srgbClr val="F8FAFC"/>
-                </a:solidFill>
-              </a:defRPr>
-            </a:pPr>
-            <a:r>
-              <a:t>• Under true core saturation, Adaptive consistently dominates interactive responsiveness.</a:t>
+              <a:t>2. Event Loop Lag (Jitter)</a:t>
+            </a:r>
+          </a:p>
+          <a:p>
+            <a:pPr>
+              <a:spcAft>
+                <a:spcPts val="400"/>
+              </a:spcAft>
+              <a:defRPr sz="1000">
+                <a:solidFill>
+                  <a:srgbClr val="F8FAFC"/>
+                </a:solidFill>
+              </a:defRPr>
+            </a:pPr>
+            <a:r>
+              <a:t>• FCFS Baseline: 98.2 ms delay</a:t>
+            </a:r>
+          </a:p>
+          <a:p>
+            <a:pPr>
+              <a:spcAft>
+                <a:spcPts val="400"/>
+              </a:spcAft>
+              <a:defRPr sz="1000">
+                <a:solidFill>
+                  <a:srgbClr val="F8FAFC"/>
+                </a:solidFill>
+              </a:defRPr>
+            </a:pPr>
+            <a:r>
+              <a:t>• Adaptive Priority: 85.9 ms delay</a:t>
+            </a:r>
+          </a:p>
+          <a:p>
+            <a:pPr>
+              <a:spcAft>
+                <a:spcPts val="400"/>
+              </a:spcAft>
+              <a:defRPr sz="1000">
+                <a:solidFill>
+                  <a:srgbClr val="F8FAFC"/>
+                </a:solidFill>
+              </a:defRPr>
+            </a:pPr>
+            <a:r>
+              <a:t>• Outcome: 12.6% Lower UI Delay (✔)</a:t>
+            </a:r>
+          </a:p>
+        </p:txBody>
+      </p:sp>
+      <p:sp>
+        <p:nvSpPr>
+          <p:cNvPr id="12" name="Rounded Rectangle 11"/>
+          <p:cNvSpPr/>
+          <p:nvPr/>
+        </p:nvSpPr>
+        <p:spPr>
+          <a:xfrm>
+            <a:off x="8046720" y="4709160"/>
+            <a:ext cx="3383280" cy="1737360"/>
+          </a:xfrm>
+          <a:prstGeom prst="roundRect">
+            <a:avLst/>
+          </a:prstGeom>
+          <a:solidFill>
+            <a:srgbClr val="182136"/>
+          </a:solidFill>
+          <a:ln w="12700">
+            <a:solidFill>
+              <a:srgbClr val="334155"/>
+            </a:solidFill>
+          </a:ln>
+        </p:spPr>
+        <p:style>
+          <a:lnRef idx="1">
+            <a:schemeClr val="accent1"/>
+          </a:lnRef>
+          <a:fillRef idx="3">
+            <a:schemeClr val="accent1"/>
+          </a:fillRef>
+          <a:effectRef idx="2">
+            <a:schemeClr val="accent1"/>
+          </a:effectRef>
+          <a:fontRef idx="minor">
+            <a:schemeClr val="lt1"/>
+          </a:fontRef>
+        </p:style>
+        <p:txBody>
+          <a:bodyPr rtlCol="0" anchor="ctr"/>
+          <a:lstStyle/>
+          <a:p>
+            <a:pPr algn="ctr"/>
+          </a:p>
+        </p:txBody>
+      </p:sp>
+      <p:sp>
+        <p:nvSpPr>
+          <p:cNvPr id="13" name="TextBox 12"/>
+          <p:cNvSpPr txBox="1"/>
+          <p:nvPr/>
+        </p:nvSpPr>
+        <p:spPr>
+          <a:xfrm>
+            <a:off x="8229600" y="4846320"/>
+            <a:ext cx="3017520" cy="1463039"/>
+          </a:xfrm>
+          <a:prstGeom prst="rect">
+            <a:avLst/>
+          </a:prstGeom>
+          <a:noFill/>
+        </p:spPr>
+        <p:txBody>
+          <a:bodyPr wrap="square">
+            <a:spAutoFit/>
+          </a:bodyPr>
+          <a:lstStyle/>
+          <a:p>
+            <a:pPr>
+              <a:spcAft>
+                <a:spcPts val="800"/>
+              </a:spcAft>
+              <a:defRPr sz="1200" b="1">
+                <a:solidFill>
+                  <a:srgbClr val="F59E0B"/>
+                </a:solidFill>
+              </a:defRPr>
+            </a:pPr>
+            <a:r>
+              <a:t>3. Visual Gantt Timeline</a:t>
+            </a:r>
+          </a:p>
+          <a:p>
+            <a:pPr>
+              <a:spcAft>
+                <a:spcPts val="400"/>
+              </a:spcAft>
+              <a:defRPr sz="1000">
+                <a:solidFill>
+                  <a:srgbClr val="F8FAFC"/>
+                </a:solidFill>
+              </a:defRPr>
+            </a:pPr>
+            <a:r>
+              <a:t>• Orange FCFS bar spans full 100% width.</a:t>
+            </a:r>
+          </a:p>
+          <a:p>
+            <a:pPr>
+              <a:spcAft>
+                <a:spcPts val="400"/>
+              </a:spcAft>
+              <a:defRPr sz="1000">
+                <a:solidFill>
+                  <a:srgbClr val="F8FAFC"/>
+                </a:solidFill>
+              </a:defRPr>
+            </a:pPr>
+            <a:r>
+              <a:t>• Blue Adaptive bar is cut in half (47%).</a:t>
+            </a:r>
+          </a:p>
+          <a:p>
+            <a:pPr>
+              <a:spcAft>
+                <a:spcPts val="400"/>
+              </a:spcAft>
+              <a:defRPr sz="1000">
+                <a:solidFill>
+                  <a:srgbClr val="F8FAFC"/>
+                </a:solidFill>
+              </a:defRPr>
+            </a:pPr>
+            <a:r>
+              <a:t>• Provides unmistakable visual proof on screen.</a:t>
             </a:r>
           </a:p>
         </p:txBody>
@@ -7707,7 +8440,7 @@
               </a:defRPr>
             </a:pPr>
             <a:r>
-              <a:t>EDUCATIONAL DEMONSTRATOR</a:t>
+              <a:t>PEDAGOGICAL THEORY LAB</a:t>
             </a:r>
           </a:p>
         </p:txBody>
@@ -7721,7 +8454,7 @@
         <p:spPr>
           <a:xfrm>
             <a:off x="731520" y="640080"/>
-            <a:ext cx="10698480" cy="548640"/>
+            <a:ext cx="10698480" cy="502920"/>
           </a:xfrm>
           <a:prstGeom prst="rect">
             <a:avLst/>
@@ -7735,14 +8468,14 @@
           <a:lstStyle/>
           <a:p>
             <a:pPr>
-              <a:defRPr sz="2200" b="1">
-                <a:solidFill>
-                  <a:srgbClr val="F8FAFC"/>
-                </a:solidFill>
-              </a:defRPr>
-            </a:pPr>
-            <a:r>
-              <a:t>Experiment 2: 4-Stage Guided OS Theory Lab</a:t>
+              <a:defRPr sz="2100" b="1">
+                <a:solidFill>
+                  <a:srgbClr val="F8FAFC"/>
+                </a:solidFill>
+              </a:defRPr>
+            </a:pPr>
+            <a:r>
+              <a:t>Experiment 2: 4-Stage Guided OS Laboratory</a:t>
             </a:r>
           </a:p>
         </p:txBody>
@@ -7755,7 +8488,7 @@
         </p:nvSpPr>
         <p:spPr>
           <a:xfrm>
-            <a:off x="731520" y="1143000"/>
+            <a:off x="731520" y="1097280"/>
             <a:ext cx="10698480" cy="365760"/>
           </a:xfrm>
           <a:prstGeom prst="rect">
@@ -7770,14 +8503,14 @@
           <a:lstStyle/>
           <a:p>
             <a:pPr>
-              <a:defRPr sz="1200">
+              <a:defRPr sz="1100">
                 <a:solidFill>
                   <a:srgbClr val="94A3B8"/>
                 </a:solidFill>
               </a:defRPr>
             </a:pPr>
             <a:r>
-              <a:t>An interactive pedagogical laboratory demonstrating synthetic task queue dynamics and preemption.</a:t>
+              <a:t>Connecting real Windows telemetry to calibrated workloads and interactive task injection.</a:t>
             </a:r>
           </a:p>
         </p:txBody>
@@ -7790,8 +8523,77 @@
         </p:nvSpPr>
         <p:spPr>
           <a:xfrm>
+            <a:off x="685800" y="1600200"/>
+            <a:ext cx="6217920" cy="4754879"/>
+          </a:xfrm>
+          <a:prstGeom prst="roundRect">
+            <a:avLst/>
+          </a:prstGeom>
+          <a:solidFill>
+            <a:srgbClr val="0F172A"/>
+          </a:solidFill>
+          <a:ln w="19050">
+            <a:solidFill>
+              <a:srgbClr val="38BDF8"/>
+            </a:solidFill>
+          </a:ln>
+        </p:spPr>
+        <p:style>
+          <a:lnRef idx="1">
+            <a:schemeClr val="accent1"/>
+          </a:lnRef>
+          <a:fillRef idx="3">
+            <a:schemeClr val="accent1"/>
+          </a:fillRef>
+          <a:effectRef idx="2">
+            <a:schemeClr val="accent1"/>
+          </a:effectRef>
+          <a:fontRef idx="minor">
+            <a:schemeClr val="lt1"/>
+          </a:fontRef>
+        </p:style>
+        <p:txBody>
+          <a:bodyPr rtlCol="0" anchor="ctr"/>
+          <a:lstStyle/>
+          <a:p>
+            <a:pPr algn="ctr"/>
+          </a:p>
+        </p:txBody>
+      </p:sp>
+      <p:pic>
+        <p:nvPicPr>
+          <p:cNvPr id="7" name="Picture 6" descr="screenshot_theory_lab.png"/>
+          <p:cNvPicPr>
+            <a:picLocks noChangeAspect="1"/>
+          </p:cNvPicPr>
+          <p:nvPr/>
+        </p:nvPicPr>
+        <p:blipFill>
+          <a:blip r:embed="rId2"/>
+          <a:stretch>
+            <a:fillRect/>
+          </a:stretch>
+        </p:blipFill>
+        <p:spPr>
+          <a:xfrm>
             <a:off x="731520" y="1645920"/>
-            <a:ext cx="10698480" cy="1005840"/>
+            <a:ext cx="6126480" cy="4663440"/>
+          </a:xfrm>
+          <a:prstGeom prst="rect">
+            <a:avLst/>
+          </a:prstGeom>
+        </p:spPr>
+      </p:pic>
+      <p:sp>
+        <p:nvSpPr>
+          <p:cNvPr id="8" name="Rounded Rectangle 7"/>
+          <p:cNvSpPr/>
+          <p:nvPr/>
+        </p:nvSpPr>
+        <p:spPr>
+          <a:xfrm>
+            <a:off x="7040880" y="1645920"/>
+            <a:ext cx="4389120" cy="2194560"/>
           </a:xfrm>
           <a:prstGeom prst="roundRect">
             <a:avLst/>
@@ -7829,14 +8631,14 @@
       </p:sp>
       <p:sp>
         <p:nvSpPr>
-          <p:cNvPr id="7" name="TextBox 6"/>
+          <p:cNvPr id="9" name="TextBox 8"/>
           <p:cNvSpPr txBox="1"/>
           <p:nvPr/>
         </p:nvSpPr>
         <p:spPr>
           <a:xfrm>
-            <a:off x="914400" y="1783080"/>
-            <a:ext cx="10332720" cy="731520"/>
+            <a:off x="7223760" y="1783080"/>
+            <a:ext cx="4023359" cy="1920240"/>
           </a:xfrm>
           <a:prstGeom prst="rect">
             <a:avLst/>
@@ -7851,42 +8653,75 @@
           <a:p>
             <a:pPr>
               <a:spcAft>
-                <a:spcPts val="200"/>
-              </a:spcAft>
-              <a:defRPr b="1" sz="1300">
+                <a:spcPts val="800"/>
+              </a:spcAft>
+              <a:defRPr sz="1200" b="1">
                 <a:solidFill>
                   <a:srgbClr val="38BDF8"/>
                 </a:solidFill>
               </a:defRPr>
             </a:pPr>
             <a:r>
-              <a:t>STAGE 1: CAPTURE</a:t>
-            </a:r>
-          </a:p>
-          <a:p>
-            <a:pPr>
-              <a:defRPr sz="1100">
-                <a:solidFill>
-                  <a:srgbClr val="F8FAFC"/>
-                </a:solidFill>
-              </a:defRPr>
-            </a:pPr>
-            <a:r>
-              <a:t>Samples live Windows host CPU utilization via NtQuerySystemInformation to ground experiment parameters in actual PC load.</a:t>
-            </a:r>
-          </a:p>
-        </p:txBody>
-      </p:sp>
-      <p:sp>
-        <p:nvSpPr>
-          <p:cNvPr id="8" name="Rounded Rectangle 7"/>
+              <a:t>Stage 1: System Baseline Telemetry</a:t>
+            </a:r>
+          </a:p>
+          <a:p>
+            <a:pPr>
+              <a:spcAft>
+                <a:spcPts val="400"/>
+              </a:spcAft>
+              <a:defRPr sz="1000">
+                <a:solidFill>
+                  <a:srgbClr val="F8FAFC"/>
+                </a:solidFill>
+              </a:defRPr>
+            </a:pPr>
+            <a:r>
+              <a:t>• Captures genuine host hardware telemetry via NtQuerySystemInformation.</a:t>
+            </a:r>
+          </a:p>
+          <a:p>
+            <a:pPr>
+              <a:spcAft>
+                <a:spcPts val="400"/>
+              </a:spcAft>
+              <a:defRPr sz="1000">
+                <a:solidFill>
+                  <a:srgbClr val="F8FAFC"/>
+                </a:solidFill>
+              </a:defRPr>
+            </a:pPr>
+            <a:r>
+              <a:t>• Samples live CPU utilization, physical core count, and system threads.</a:t>
+            </a:r>
+          </a:p>
+          <a:p>
+            <a:pPr>
+              <a:spcAft>
+                <a:spcPts val="400"/>
+              </a:spcAft>
+              <a:defRPr sz="1000">
+                <a:solidFill>
+                  <a:srgbClr val="F8FAFC"/>
+                </a:solidFill>
+              </a:defRPr>
+            </a:pPr>
+            <a:r>
+              <a:t>• Calculates workload scaling factors and tunes aging thresholds based on live host load.</a:t>
+            </a:r>
+          </a:p>
+        </p:txBody>
+      </p:sp>
+      <p:sp>
+        <p:nvSpPr>
+          <p:cNvPr id="10" name="Rounded Rectangle 9"/>
           <p:cNvSpPr/>
           <p:nvPr/>
         </p:nvSpPr>
         <p:spPr>
           <a:xfrm>
-            <a:off x="731520" y="2788920"/>
-            <a:ext cx="10698480" cy="1005840"/>
+            <a:off x="7040880" y="4023360"/>
+            <a:ext cx="4389120" cy="2286000"/>
           </a:xfrm>
           <a:prstGeom prst="roundRect">
             <a:avLst/>
@@ -7924,14 +8759,14 @@
       </p:sp>
       <p:sp>
         <p:nvSpPr>
-          <p:cNvPr id="9" name="TextBox 8"/>
+          <p:cNvPr id="11" name="TextBox 10"/>
           <p:cNvSpPr txBox="1"/>
           <p:nvPr/>
         </p:nvSpPr>
         <p:spPr>
           <a:xfrm>
-            <a:off x="914400" y="2926079"/>
-            <a:ext cx="10332720" cy="731520"/>
+            <a:off x="7223760" y="4160520"/>
+            <a:ext cx="4023359" cy="2011680"/>
           </a:xfrm>
           <a:prstGeom prst="rect">
             <a:avLst/>
@@ -7946,218 +8781,91 @@
           <a:p>
             <a:pPr>
               <a:spcAft>
-                <a:spcPts val="200"/>
-              </a:spcAft>
-              <a:defRPr b="1" sz="1300">
+                <a:spcPts val="800"/>
+              </a:spcAft>
+              <a:defRPr sz="1200" b="1">
                 <a:solidFill>
                   <a:srgbClr val="10B981"/>
                 </a:solidFill>
               </a:defRPr>
             </a:pPr>
             <a:r>
-              <a:t>STAGE 2: PREPARE</a:t>
-            </a:r>
-          </a:p>
-          <a:p>
-            <a:pPr>
-              <a:defRPr sz="1100">
-                <a:solidFill>
-                  <a:srgbClr val="F8FAFC"/>
-                </a:solidFill>
-              </a:defRPr>
-            </a:pPr>
-            <a:r>
-              <a:t>Derives a calibrated synthetic task workload mix: long background compute batches (B1, B2) and latency-sensitive interactive requests (I1).</a:t>
-            </a:r>
-          </a:p>
-        </p:txBody>
-      </p:sp>
-      <p:sp>
-        <p:nvSpPr>
-          <p:cNvPr id="10" name="Rounded Rectangle 9"/>
-          <p:cNvSpPr/>
-          <p:nvPr/>
-        </p:nvSpPr>
-        <p:spPr>
-          <a:xfrm>
-            <a:off x="731520" y="3931920"/>
-            <a:ext cx="10698480" cy="1005840"/>
-          </a:xfrm>
-          <a:prstGeom prst="roundRect">
-            <a:avLst/>
-          </a:prstGeom>
-          <a:solidFill>
-            <a:srgbClr val="182136"/>
-          </a:solidFill>
-          <a:ln w="12700">
-            <a:solidFill>
-              <a:srgbClr val="334155"/>
-            </a:solidFill>
-          </a:ln>
-        </p:spPr>
-        <p:style>
-          <a:lnRef idx="1">
-            <a:schemeClr val="accent1"/>
-          </a:lnRef>
-          <a:fillRef idx="3">
-            <a:schemeClr val="accent1"/>
-          </a:fillRef>
-          <a:effectRef idx="2">
-            <a:schemeClr val="accent1"/>
-          </a:effectRef>
-          <a:fontRef idx="minor">
-            <a:schemeClr val="lt1"/>
-          </a:fontRef>
-        </p:style>
-        <p:txBody>
-          <a:bodyPr rtlCol="0" anchor="ctr"/>
-          <a:lstStyle/>
-          <a:p>
-            <a:pPr algn="ctr"/>
-          </a:p>
-        </p:txBody>
-      </p:sp>
-      <p:sp>
-        <p:nvSpPr>
-          <p:cNvPr id="11" name="TextBox 10"/>
-          <p:cNvSpPr txBox="1"/>
-          <p:nvPr/>
-        </p:nvSpPr>
-        <p:spPr>
-          <a:xfrm>
-            <a:off x="914400" y="4069080"/>
-            <a:ext cx="10332720" cy="731520"/>
-          </a:xfrm>
-          <a:prstGeom prst="rect">
-            <a:avLst/>
-          </a:prstGeom>
-          <a:noFill/>
-        </p:spPr>
-        <p:txBody>
-          <a:bodyPr wrap="square">
-            <a:spAutoFit/>
-          </a:bodyPr>
-          <a:lstStyle/>
-          <a:p>
-            <a:pPr>
-              <a:spcAft>
-                <a:spcPts val="200"/>
-              </a:spcAft>
-              <a:defRPr b="1" sz="1300">
-                <a:solidFill>
-                  <a:srgbClr val="F59E0B"/>
-                </a:solidFill>
-              </a:defRPr>
-            </a:pPr>
-            <a:r>
-              <a:t>STAGE 3: OBSERVE</a:t>
-            </a:r>
-          </a:p>
-          <a:p>
-            <a:pPr>
-              <a:defRPr sz="1100">
-                <a:solidFill>
-                  <a:srgbClr val="F8FAFC"/>
-                </a:solidFill>
-              </a:defRPr>
-            </a:pPr>
-            <a:r>
-              <a:t>Executes FCFS vs Adaptive live. Allows real-time injection of urgent tasks to visibly demonstrate Head-of-Line Blocking vs Preemption.</a:t>
-            </a:r>
-          </a:p>
-        </p:txBody>
-      </p:sp>
-      <p:sp>
-        <p:nvSpPr>
-          <p:cNvPr id="12" name="Rounded Rectangle 11"/>
-          <p:cNvSpPr/>
-          <p:nvPr/>
-        </p:nvSpPr>
-        <p:spPr>
-          <a:xfrm>
-            <a:off x="731520" y="5074920"/>
-            <a:ext cx="10698480" cy="1005840"/>
-          </a:xfrm>
-          <a:prstGeom prst="roundRect">
-            <a:avLst/>
-          </a:prstGeom>
-          <a:solidFill>
-            <a:srgbClr val="182136"/>
-          </a:solidFill>
-          <a:ln w="12700">
-            <a:solidFill>
-              <a:srgbClr val="334155"/>
-            </a:solidFill>
-          </a:ln>
-        </p:spPr>
-        <p:style>
-          <a:lnRef idx="1">
-            <a:schemeClr val="accent1"/>
-          </a:lnRef>
-          <a:fillRef idx="3">
-            <a:schemeClr val="accent1"/>
-          </a:fillRef>
-          <a:effectRef idx="2">
-            <a:schemeClr val="accent1"/>
-          </a:effectRef>
-          <a:fontRef idx="minor">
-            <a:schemeClr val="lt1"/>
-          </a:fontRef>
-        </p:style>
-        <p:txBody>
-          <a:bodyPr rtlCol="0" anchor="ctr"/>
-          <a:lstStyle/>
-          <a:p>
-            <a:pPr algn="ctr"/>
-          </a:p>
-        </p:txBody>
-      </p:sp>
-      <p:sp>
-        <p:nvSpPr>
-          <p:cNvPr id="13" name="TextBox 12"/>
-          <p:cNvSpPr txBox="1"/>
-          <p:nvPr/>
-        </p:nvSpPr>
-        <p:spPr>
-          <a:xfrm>
-            <a:off x="914400" y="5212080"/>
-            <a:ext cx="10332720" cy="731520"/>
-          </a:xfrm>
-          <a:prstGeom prst="rect">
-            <a:avLst/>
-          </a:prstGeom>
-          <a:noFill/>
-        </p:spPr>
-        <p:txBody>
-          <a:bodyPr wrap="square">
-            <a:spAutoFit/>
-          </a:bodyPr>
-          <a:lstStyle/>
-          <a:p>
-            <a:pPr>
-              <a:spcAft>
-                <a:spcPts val="200"/>
-              </a:spcAft>
-              <a:defRPr b="1" sz="1300">
-                <a:solidFill>
-                  <a:srgbClr val="A855F7"/>
-                </a:solidFill>
-              </a:defRPr>
-            </a:pPr>
-            <a:r>
-              <a:t>STAGE 4: REPLAY</a:t>
-            </a:r>
-          </a:p>
-          <a:p>
-            <a:pPr>
-              <a:defRPr sz="1100">
-                <a:solidFill>
-                  <a:srgbClr val="F8FAFC"/>
-                </a:solidFill>
-              </a:defRPr>
-            </a:pPr>
-            <a:r>
-              <a:t>Step-by-step interactive timeline playback with Play/Pause controls, dual Gantt charts, and microsecond turnaround breakdowns.</a:t>
+              <a:t>Stage 2: Workload Mix Preparation</a:t>
+            </a:r>
+          </a:p>
+          <a:p>
+            <a:pPr>
+              <a:spcAft>
+                <a:spcPts val="400"/>
+              </a:spcAft>
+              <a:defRPr sz="1000">
+                <a:solidFill>
+                  <a:srgbClr val="F8FAFC"/>
+                </a:solidFill>
+              </a:defRPr>
+            </a:pPr>
+            <a:r>
+              <a:t>• Prepares a controlled synthetic job queue:</a:t>
+            </a:r>
+          </a:p>
+          <a:p>
+            <a:pPr>
+              <a:spcAft>
+                <a:spcPts val="400"/>
+              </a:spcAft>
+              <a:defRPr sz="1000">
+                <a:solidFill>
+                  <a:srgbClr val="F8FAFC"/>
+                </a:solidFill>
+              </a:defRPr>
+            </a:pPr>
+            <a:r>
+              <a:t>•   • B1: Long CPU-bound matrix computation (2,400ms)</a:t>
+            </a:r>
+          </a:p>
+          <a:p>
+            <a:pPr>
+              <a:spcAft>
+                <a:spcPts val="400"/>
+              </a:spcAft>
+              <a:defRPr sz="1000">
+                <a:solidFill>
+                  <a:srgbClr val="F8FAFC"/>
+                </a:solidFill>
+              </a:defRPr>
+            </a:pPr>
+            <a:r>
+              <a:t>•   • B2: Memory-stride cache pressure worker (1,800ms)</a:t>
+            </a:r>
+          </a:p>
+          <a:p>
+            <a:pPr>
+              <a:spcAft>
+                <a:spcPts val="400"/>
+              </a:spcAft>
+              <a:defRPr sz="1000">
+                <a:solidFill>
+                  <a:srgbClr val="F8FAFC"/>
+                </a:solidFill>
+              </a:defRPr>
+            </a:pPr>
+            <a:r>
+              <a:t>•   • I1: Short interactive UI click request (35ms)</a:t>
+            </a:r>
+          </a:p>
+          <a:p>
+            <a:pPr>
+              <a:spcAft>
+                <a:spcPts val="400"/>
+              </a:spcAft>
+              <a:defRPr sz="1000">
+                <a:solidFill>
+                  <a:srgbClr val="F8FAFC"/>
+                </a:solidFill>
+              </a:defRPr>
+            </a:pPr>
+            <a:r>
+              <a:t>• Reveals the Convoy Effect under controlled lab conditions.</a:t>
             </a:r>
           </a:p>
         </p:txBody>
@@ -8253,7 +8961,7 @@
               </a:defRPr>
             </a:pPr>
             <a:r>
-              <a:t>THEORETICAL INSIGHT</a:t>
+              <a:t>PREEMPTION IN ACTION</a:t>
             </a:r>
           </a:p>
         </p:txBody>
@@ -8267,7 +8975,7 @@
         <p:spPr>
           <a:xfrm>
             <a:off x="731520" y="640080"/>
-            <a:ext cx="10698480" cy="548640"/>
+            <a:ext cx="10698480" cy="502920"/>
           </a:xfrm>
           <a:prstGeom prst="rect">
             <a:avLst/>
@@ -8281,14 +8989,14 @@
           <a:lstStyle/>
           <a:p>
             <a:pPr>
-              <a:defRPr sz="2200" b="1">
-                <a:solidFill>
-                  <a:srgbClr val="F8FAFC"/>
-                </a:solidFill>
-              </a:defRPr>
-            </a:pPr>
-            <a:r>
-              <a:t>The Fundamental Operating System Trade-Off</a:t>
+              <a:defRPr sz="2100" b="1">
+                <a:solidFill>
+                  <a:srgbClr val="F8FAFC"/>
+                </a:solidFill>
+              </a:defRPr>
+            </a:pPr>
+            <a:r>
+              <a:t>Stage 3 &amp; 4: Live Preemption &amp; Microsecond Replay</a:t>
             </a:r>
           </a:p>
         </p:txBody>
@@ -8301,7 +9009,7 @@
         </p:nvSpPr>
         <p:spPr>
           <a:xfrm>
-            <a:off x="731520" y="1143000"/>
+            <a:off x="731520" y="1097280"/>
             <a:ext cx="10698480" cy="365760"/>
           </a:xfrm>
           <a:prstGeom prst="rect">
@@ -8316,14 +9024,14 @@
           <a:lstStyle/>
           <a:p>
             <a:pPr>
-              <a:defRPr sz="1200">
+              <a:defRPr sz="1100">
                 <a:solidFill>
                   <a:srgbClr val="94A3B8"/>
                 </a:solidFill>
               </a:defRPr>
             </a:pPr>
             <a:r>
-              <a:t>Why no single scheduling algorithm is universally superior under all operating conditions.</a:t>
+              <a:t>Observing live request injection and inspecting sub-microsecond dual Gantt execution traces.</a:t>
             </a:r>
           </a:p>
         </p:txBody>
@@ -8337,7 +9045,7 @@
         <p:spPr>
           <a:xfrm>
             <a:off x="731520" y="1645920"/>
-            <a:ext cx="5212080" cy="4572000"/>
+            <a:ext cx="4389120" cy="2194560"/>
           </a:xfrm>
           <a:prstGeom prst="roundRect">
             <a:avLst/>
@@ -8381,8 +9089,8 @@
         </p:nvSpPr>
         <p:spPr>
           <a:xfrm>
-            <a:off x="960120" y="1828800"/>
-            <a:ext cx="4754880" cy="4206240"/>
+            <a:off x="914400" y="1783080"/>
+            <a:ext cx="4023359" cy="1920240"/>
           </a:xfrm>
           <a:prstGeom prst="rect">
             <a:avLst/>
@@ -8397,76 +9105,61 @@
           <a:p>
             <a:pPr>
               <a:spcAft>
-                <a:spcPts val="1000"/>
-              </a:spcAft>
-              <a:defRPr sz="1400" b="1">
+                <a:spcPts val="800"/>
+              </a:spcAft>
+              <a:defRPr sz="1200" b="1">
                 <a:solidFill>
                   <a:srgbClr val="F59E0B"/>
                 </a:solidFill>
               </a:defRPr>
             </a:pPr>
             <a:r>
-              <a:t>When FCFS is Optimal (Low Contention)</a:t>
-            </a:r>
-          </a:p>
-          <a:p>
-            <a:pPr>
-              <a:spcAft>
-                <a:spcPts val="600"/>
-              </a:spcAft>
-              <a:defRPr sz="1100">
-                <a:solidFill>
-                  <a:srgbClr val="F8FAFC"/>
-                </a:solidFill>
-              </a:defRPr>
-            </a:pPr>
-            <a:r>
-              <a:t>• Zero Algorithm Overhead: FCFS incurs O(1) scheduling logic with zero kernel-mode context switches.</a:t>
-            </a:r>
-          </a:p>
-          <a:p>
-            <a:pPr>
-              <a:spcAft>
-                <a:spcPts val="600"/>
-              </a:spcAft>
-              <a:defRPr sz="1100">
-                <a:solidFill>
-                  <a:srgbClr val="F8FAFC"/>
-                </a:solidFill>
-              </a:defRPr>
-            </a:pPr>
-            <a:r>
-              <a:t>• Superior Cache Locality: Threads remain warm on their allocated physical cores without thread migration.</a:t>
-            </a:r>
-          </a:p>
-          <a:p>
-            <a:pPr>
-              <a:spcAft>
-                <a:spcPts val="600"/>
-              </a:spcAft>
-              <a:defRPr sz="1100">
-                <a:solidFill>
-                  <a:srgbClr val="F8FAFC"/>
-                </a:solidFill>
-              </a:defRPr>
-            </a:pPr>
-            <a:r>
-              <a:t>• Zero System Call Penalties: No periodic SetThreadPriority or watchdog timer interrupts.</a:t>
-            </a:r>
-          </a:p>
-          <a:p>
-            <a:pPr>
-              <a:spcAft>
-                <a:spcPts val="600"/>
-              </a:spcAft>
-              <a:defRPr sz="1100">
-                <a:solidFill>
-                  <a:srgbClr val="F8FAFC"/>
-                </a:solidFill>
-              </a:defRPr>
-            </a:pPr>
-            <a:r>
-              <a:t>• When CPU cores have idle capacity (core slack), FCFS matches or slightly beats Adaptive because priority management overhead is avoided.</a:t>
+              <a:t>Stage 3: Interactive Request Injection</a:t>
+            </a:r>
+          </a:p>
+          <a:p>
+            <a:pPr>
+              <a:spcAft>
+                <a:spcPts val="400"/>
+              </a:spcAft>
+              <a:defRPr sz="1000">
+                <a:solidFill>
+                  <a:srgbClr val="F8FAFC"/>
+                </a:solidFill>
+              </a:defRPr>
+            </a:pPr>
+            <a:r>
+              <a:t>• User clicks 'Submit Urgent Request' while long compute job B1 is executing.</a:t>
+            </a:r>
+          </a:p>
+          <a:p>
+            <a:pPr>
+              <a:spcAft>
+                <a:spcPts val="400"/>
+              </a:spcAft>
+              <a:defRPr sz="1000">
+                <a:solidFill>
+                  <a:srgbClr val="F8FAFC"/>
+                </a:solidFill>
+              </a:defRPr>
+            </a:pPr>
+            <a:r>
+              <a:t>• FCFS: Urgent task is blocked in the ready queue until B1 completely finishes (2,400ms lag).</a:t>
+            </a:r>
+          </a:p>
+          <a:p>
+            <a:pPr>
+              <a:spcAft>
+                <a:spcPts val="400"/>
+              </a:spcAft>
+              <a:defRPr sz="1000">
+                <a:solidFill>
+                  <a:srgbClr val="F8FAFC"/>
+                </a:solidFill>
+              </a:defRPr>
+            </a:pPr>
+            <a:r>
+              <a:t>• Adaptive: B1 cooperative checkpoint yields CPU within 15ms; urgent task finishes immediately.</a:t>
             </a:r>
           </a:p>
         </p:txBody>
@@ -8479,8 +9172,8 @@
         </p:nvSpPr>
         <p:spPr>
           <a:xfrm>
-            <a:off x="6217920" y="1645920"/>
-            <a:ext cx="5212080" cy="4572000"/>
+            <a:off x="731520" y="4023360"/>
+            <a:ext cx="4389120" cy="2286000"/>
           </a:xfrm>
           <a:prstGeom prst="roundRect">
             <a:avLst/>
@@ -8524,8 +9217,8 @@
         </p:nvSpPr>
         <p:spPr>
           <a:xfrm>
-            <a:off x="6446520" y="1828800"/>
-            <a:ext cx="4754880" cy="4206240"/>
+            <a:off x="914400" y="4160520"/>
+            <a:ext cx="4023359" cy="2011680"/>
           </a:xfrm>
           <a:prstGeom prst="rect">
             <a:avLst/>
@@ -8540,95 +9233,134 @@
           <a:p>
             <a:pPr>
               <a:spcAft>
-                <a:spcPts val="1000"/>
-              </a:spcAft>
-              <a:defRPr sz="1400" b="1">
+                <a:spcPts val="800"/>
+              </a:spcAft>
+              <a:defRPr sz="1200" b="1">
                 <a:solidFill>
                   <a:srgbClr val="10B981"/>
                 </a:solidFill>
               </a:defRPr>
             </a:pPr>
             <a:r>
-              <a:t>When Adaptive is Vital (High Saturation)</a:t>
-            </a:r>
-          </a:p>
-          <a:p>
-            <a:pPr>
-              <a:spcAft>
-                <a:spcPts val="600"/>
-              </a:spcAft>
-              <a:defRPr sz="1100">
-                <a:solidFill>
-                  <a:srgbClr val="F8FAFC"/>
-                </a:solidFill>
-              </a:defRPr>
-            </a:pPr>
-            <a:r>
-              <a:t>• Preemptive Guarantee: Prevents heavy compute jobs from holding the CPU hostage.</a:t>
-            </a:r>
-          </a:p>
-          <a:p>
-            <a:pPr>
-              <a:spcAft>
-                <a:spcPts val="600"/>
-              </a:spcAft>
-              <a:defRPr sz="1100">
-                <a:solidFill>
-                  <a:srgbClr val="F8FAFC"/>
-                </a:solidFill>
-              </a:defRPr>
-            </a:pPr>
-            <a:r>
-              <a:t>• Interactive Latency Slashed: Reduces browser load times by &gt;50% and eliminates UI freezing.</a:t>
-            </a:r>
-          </a:p>
-          <a:p>
-            <a:pPr>
-              <a:spcAft>
-                <a:spcPts val="600"/>
-              </a:spcAft>
-              <a:defRPr sz="1100">
-                <a:solidFill>
-                  <a:srgbClr val="F8FAFC"/>
-                </a:solidFill>
-              </a:defRPr>
-            </a:pPr>
-            <a:r>
-              <a:t>• Acceptable Trade-off: Background computation experiences a minor makespan penalty in exchange for human UI responsiveness.</a:t>
-            </a:r>
-          </a:p>
-          <a:p>
-            <a:pPr>
-              <a:spcAft>
-                <a:spcPts val="600"/>
-              </a:spcAft>
-              <a:defRPr sz="1100">
-                <a:solidFill>
-                  <a:srgbClr val="F8FAFC"/>
-                </a:solidFill>
-              </a:defRPr>
-            </a:pPr>
-            <a:r>
-              <a:t>• Starvation Immunity: Dynamic aging ensures long batch tasks always achieve forward progress.</a:t>
-            </a:r>
-          </a:p>
-          <a:p>
-            <a:pPr>
-              <a:spcAft>
-                <a:spcPts val="600"/>
-              </a:spcAft>
-              <a:defRPr sz="1100">
-                <a:solidFill>
-                  <a:srgbClr val="F8FAFC"/>
-                </a:solidFill>
-              </a:defRPr>
-            </a:pPr>
-            <a:r>
-              <a:t>• Reflects the architectural philosophy of modern production schedulers (Linux CFS, Windows NT Priority Bands).</a:t>
-            </a:r>
-          </a:p>
-        </p:txBody>
-      </p:sp>
+              <a:t>Stage 4: Recorded-Event Replay</a:t>
+            </a:r>
+          </a:p>
+          <a:p>
+            <a:pPr>
+              <a:spcAft>
+                <a:spcPts val="400"/>
+              </a:spcAft>
+              <a:defRPr sz="1000">
+                <a:solidFill>
+                  <a:srgbClr val="F8FAFC"/>
+                </a:solidFill>
+              </a:defRPr>
+            </a:pPr>
+            <a:r>
+              <a:t>• Interactive playback inspector with Play, Pause, Step Back, and Step Forward controls.</a:t>
+            </a:r>
+          </a:p>
+          <a:p>
+            <a:pPr>
+              <a:spcAft>
+                <a:spcPts val="400"/>
+              </a:spcAft>
+              <a:defRPr sz="1000">
+                <a:solidFill>
+                  <a:srgbClr val="F8FAFC"/>
+                </a:solidFill>
+              </a:defRPr>
+            </a:pPr>
+            <a:r>
+              <a:t>• Inspects exact QPC arrival timestamps and dispatcher transition states.</a:t>
+            </a:r>
+          </a:p>
+          <a:p>
+            <a:pPr>
+              <a:spcAft>
+                <a:spcPts val="400"/>
+              </a:spcAft>
+              <a:defRPr sz="1000">
+                <a:solidFill>
+                  <a:srgbClr val="F8FAFC"/>
+                </a:solidFill>
+              </a:defRPr>
+            </a:pPr>
+            <a:r>
+              <a:t>• Dual microsecond Gantt tracks visibly verify task preemption and resumption slices.</a:t>
+            </a:r>
+          </a:p>
+        </p:txBody>
+      </p:sp>
+      <p:sp>
+        <p:nvSpPr>
+          <p:cNvPr id="10" name="Rounded Rectangle 9"/>
+          <p:cNvSpPr/>
+          <p:nvPr/>
+        </p:nvSpPr>
+        <p:spPr>
+          <a:xfrm>
+            <a:off x="5257800" y="1600200"/>
+            <a:ext cx="6217920" cy="4754879"/>
+          </a:xfrm>
+          <a:prstGeom prst="roundRect">
+            <a:avLst/>
+          </a:prstGeom>
+          <a:solidFill>
+            <a:srgbClr val="0F172A"/>
+          </a:solidFill>
+          <a:ln w="19050">
+            <a:solidFill>
+              <a:srgbClr val="38BDF8"/>
+            </a:solidFill>
+          </a:ln>
+        </p:spPr>
+        <p:style>
+          <a:lnRef idx="1">
+            <a:schemeClr val="accent1"/>
+          </a:lnRef>
+          <a:fillRef idx="3">
+            <a:schemeClr val="accent1"/>
+          </a:fillRef>
+          <a:effectRef idx="2">
+            <a:schemeClr val="accent1"/>
+          </a:effectRef>
+          <a:fontRef idx="minor">
+            <a:schemeClr val="lt1"/>
+          </a:fontRef>
+        </p:style>
+        <p:txBody>
+          <a:bodyPr rtlCol="0" anchor="ctr"/>
+          <a:lstStyle/>
+          <a:p>
+            <a:pPr algn="ctr"/>
+          </a:p>
+        </p:txBody>
+      </p:sp>
+      <p:pic>
+        <p:nvPicPr>
+          <p:cNvPr id="11" name="Picture 10" descr="screenshot_stage34_cropped.png"/>
+          <p:cNvPicPr>
+            <a:picLocks noChangeAspect="1"/>
+          </p:cNvPicPr>
+          <p:nvPr/>
+        </p:nvPicPr>
+        <p:blipFill>
+          <a:blip r:embed="rId2"/>
+          <a:stretch>
+            <a:fillRect/>
+          </a:stretch>
+        </p:blipFill>
+        <p:spPr>
+          <a:xfrm>
+            <a:off x="5303520" y="1645920"/>
+            <a:ext cx="6126480" cy="4663440"/>
+          </a:xfrm>
+          <a:prstGeom prst="rect">
+            <a:avLst/>
+          </a:prstGeom>
+        </p:spPr>
+      </p:pic>
     </p:spTree>
   </p:cSld>
   <p:clrMapOvr>
